--- a/RISCVstage3.pptx
+++ b/RISCVstage3.pptx
@@ -112,6 +112,131 @@
 </p:presentation>
 </file>
 
+<file path=ppt/revisionInfo.xml><?xml version="1.0" encoding="utf-8"?>
+<p1510:revInfo xmlns:a="http://schemas.openxmlformats.org/drawingml/2006/main" xmlns:r="http://schemas.openxmlformats.org/officeDocument/2006/relationships" xmlns:p1510="http://schemas.microsoft.com/office/powerpoint/2015/10/main">
+  <p1510:revLst>
+    <p1510:client id="{E75867FF-49DB-4DC0-967A-A19776D02C5E}" v="2" dt="2026-03-05T22:38:37.733"/>
+  </p1510:revLst>
+</p1510:revInfo>
+</file>
+
+<file path=ppt/changesInfos/changesInfo1.xml><?xml version="1.0" encoding="utf-8"?>
+<pc:chgInfo xmlns:a="http://schemas.openxmlformats.org/drawingml/2006/main" xmlns:r="http://schemas.openxmlformats.org/officeDocument/2006/relationships" xmlns:ac="http://schemas.microsoft.com/office/drawing/2013/main/command" xmlns:pc="http://schemas.microsoft.com/office/powerpoint/2013/main/command">
+  <pc:docChgLst>
+    <pc:chgData name="York, George W CIV USAF USAFA DF/DFEC" userId="1fb5875a-4594-4db2-80fb-f0db3de11280" providerId="ADAL" clId="{09330963-85FD-4C99-A81B-94D0EE5CFFEB}"/>
+    <pc:docChg chg="modSld">
+      <pc:chgData name="York, George W CIV USAF USAFA DF/DFEC" userId="1fb5875a-4594-4db2-80fb-f0db3de11280" providerId="ADAL" clId="{09330963-85FD-4C99-A81B-94D0EE5CFFEB}" dt="2026-03-05T22:46:17.762" v="4" actId="20577"/>
+      <pc:docMkLst>
+        <pc:docMk/>
+      </pc:docMkLst>
+      <pc:sldChg chg="addSp modSp mod">
+        <pc:chgData name="York, George W CIV USAF USAFA DF/DFEC" userId="1fb5875a-4594-4db2-80fb-f0db3de11280" providerId="ADAL" clId="{09330963-85FD-4C99-A81B-94D0EE5CFFEB}" dt="2026-03-05T22:46:17.762" v="4" actId="20577"/>
+        <pc:sldMkLst>
+          <pc:docMk/>
+          <pc:sldMk cId="1501170907" sldId="256"/>
+        </pc:sldMkLst>
+        <pc:spChg chg="mod">
+          <ac:chgData name="York, George W CIV USAF USAFA DF/DFEC" userId="1fb5875a-4594-4db2-80fb-f0db3de11280" providerId="ADAL" clId="{09330963-85FD-4C99-A81B-94D0EE5CFFEB}" dt="2026-03-05T22:46:17.762" v="4" actId="20577"/>
+          <ac:spMkLst>
+            <pc:docMk/>
+            <pc:sldMk cId="1501170907" sldId="256"/>
+            <ac:spMk id="4" creationId="{FB55267A-D19E-887C-DE49-0FCC56FF700B}"/>
+          </ac:spMkLst>
+        </pc:spChg>
+        <pc:spChg chg="add mod">
+          <ac:chgData name="York, George W CIV USAF USAFA DF/DFEC" userId="1fb5875a-4594-4db2-80fb-f0db3de11280" providerId="ADAL" clId="{09330963-85FD-4C99-A81B-94D0EE5CFFEB}" dt="2026-03-05T22:38:42.118" v="2" actId="1076"/>
+          <ac:spMkLst>
+            <pc:docMk/>
+            <pc:sldMk cId="1501170907" sldId="256"/>
+            <ac:spMk id="105" creationId="{8150CAF1-DAFF-41B1-37D9-3AA58EDF71DA}"/>
+          </ac:spMkLst>
+        </pc:spChg>
+        <pc:spChg chg="add mod">
+          <ac:chgData name="York, George W CIV USAF USAFA DF/DFEC" userId="1fb5875a-4594-4db2-80fb-f0db3de11280" providerId="ADAL" clId="{09330963-85FD-4C99-A81B-94D0EE5CFFEB}" dt="2026-03-05T22:29:55.846" v="0"/>
+          <ac:spMkLst>
+            <pc:docMk/>
+            <pc:sldMk cId="1501170907" sldId="256"/>
+            <ac:spMk id="106" creationId="{802EBAD3-1207-E175-F4E6-F1CAAFD5CB84}"/>
+          </ac:spMkLst>
+        </pc:spChg>
+        <pc:spChg chg="add mod">
+          <ac:chgData name="York, George W CIV USAF USAFA DF/DFEC" userId="1fb5875a-4594-4db2-80fb-f0db3de11280" providerId="ADAL" clId="{09330963-85FD-4C99-A81B-94D0EE5CFFEB}" dt="2026-03-05T22:29:55.846" v="0"/>
+          <ac:spMkLst>
+            <pc:docMk/>
+            <pc:sldMk cId="1501170907" sldId="256"/>
+            <ac:spMk id="107" creationId="{B1546BBC-B812-DED8-4B26-9FABE47BC3AA}"/>
+          </ac:spMkLst>
+        </pc:spChg>
+        <pc:spChg chg="add mod">
+          <ac:chgData name="York, George W CIV USAF USAFA DF/DFEC" userId="1fb5875a-4594-4db2-80fb-f0db3de11280" providerId="ADAL" clId="{09330963-85FD-4C99-A81B-94D0EE5CFFEB}" dt="2026-03-05T22:29:55.846" v="0"/>
+          <ac:spMkLst>
+            <pc:docMk/>
+            <pc:sldMk cId="1501170907" sldId="256"/>
+            <ac:spMk id="109" creationId="{A81CABDD-6671-8136-C507-5421CBF47C22}"/>
+          </ac:spMkLst>
+        </pc:spChg>
+        <pc:spChg chg="add mod">
+          <ac:chgData name="York, George W CIV USAF USAFA DF/DFEC" userId="1fb5875a-4594-4db2-80fb-f0db3de11280" providerId="ADAL" clId="{09330963-85FD-4C99-A81B-94D0EE5CFFEB}" dt="2026-03-05T22:29:55.846" v="0"/>
+          <ac:spMkLst>
+            <pc:docMk/>
+            <pc:sldMk cId="1501170907" sldId="256"/>
+            <ac:spMk id="110" creationId="{F182B11B-81F0-C7FD-76B3-7C27A04FAE43}"/>
+          </ac:spMkLst>
+        </pc:spChg>
+        <pc:cxnChg chg="add mod">
+          <ac:chgData name="York, George W CIV USAF USAFA DF/DFEC" userId="1fb5875a-4594-4db2-80fb-f0db3de11280" providerId="ADAL" clId="{09330963-85FD-4C99-A81B-94D0EE5CFFEB}" dt="2026-03-05T22:29:55.846" v="0"/>
+          <ac:cxnSpMkLst>
+            <pc:docMk/>
+            <pc:sldMk cId="1501170907" sldId="256"/>
+            <ac:cxnSpMk id="108" creationId="{55D04E53-F0F2-CC32-832F-AD990A0BD8D2}"/>
+          </ac:cxnSpMkLst>
+        </pc:cxnChg>
+        <pc:cxnChg chg="add mod">
+          <ac:chgData name="York, George W CIV USAF USAFA DF/DFEC" userId="1fb5875a-4594-4db2-80fb-f0db3de11280" providerId="ADAL" clId="{09330963-85FD-4C99-A81B-94D0EE5CFFEB}" dt="2026-03-05T22:29:55.846" v="0"/>
+          <ac:cxnSpMkLst>
+            <pc:docMk/>
+            <pc:sldMk cId="1501170907" sldId="256"/>
+            <ac:cxnSpMk id="120" creationId="{1883FA79-CBE1-81F9-475F-742DC442633A}"/>
+          </ac:cxnSpMkLst>
+        </pc:cxnChg>
+        <pc:cxnChg chg="add mod">
+          <ac:chgData name="York, George W CIV USAF USAFA DF/DFEC" userId="1fb5875a-4594-4db2-80fb-f0db3de11280" providerId="ADAL" clId="{09330963-85FD-4C99-A81B-94D0EE5CFFEB}" dt="2026-03-05T22:29:55.846" v="0"/>
+          <ac:cxnSpMkLst>
+            <pc:docMk/>
+            <pc:sldMk cId="1501170907" sldId="256"/>
+            <ac:cxnSpMk id="121" creationId="{D53ADBF7-10DC-5789-46E9-813992762F1C}"/>
+          </ac:cxnSpMkLst>
+        </pc:cxnChg>
+        <pc:cxnChg chg="add mod">
+          <ac:chgData name="York, George W CIV USAF USAFA DF/DFEC" userId="1fb5875a-4594-4db2-80fb-f0db3de11280" providerId="ADAL" clId="{09330963-85FD-4C99-A81B-94D0EE5CFFEB}" dt="2026-03-05T22:29:55.846" v="0"/>
+          <ac:cxnSpMkLst>
+            <pc:docMk/>
+            <pc:sldMk cId="1501170907" sldId="256"/>
+            <ac:cxnSpMk id="123" creationId="{61CB085F-EFA5-81F0-171A-B0F01423DFC7}"/>
+          </ac:cxnSpMkLst>
+        </pc:cxnChg>
+        <pc:cxnChg chg="add mod">
+          <ac:chgData name="York, George W CIV USAF USAFA DF/DFEC" userId="1fb5875a-4594-4db2-80fb-f0db3de11280" providerId="ADAL" clId="{09330963-85FD-4C99-A81B-94D0EE5CFFEB}" dt="2026-03-05T22:29:55.846" v="0"/>
+          <ac:cxnSpMkLst>
+            <pc:docMk/>
+            <pc:sldMk cId="1501170907" sldId="256"/>
+            <ac:cxnSpMk id="125" creationId="{EC42D385-1455-5F7D-5DE9-63C32D5B7E54}"/>
+          </ac:cxnSpMkLst>
+        </pc:cxnChg>
+        <pc:cxnChg chg="add mod">
+          <ac:chgData name="York, George W CIV USAF USAFA DF/DFEC" userId="1fb5875a-4594-4db2-80fb-f0db3de11280" providerId="ADAL" clId="{09330963-85FD-4C99-A81B-94D0EE5CFFEB}" dt="2026-03-05T22:29:55.846" v="0"/>
+          <ac:cxnSpMkLst>
+            <pc:docMk/>
+            <pc:sldMk cId="1501170907" sldId="256"/>
+            <ac:cxnSpMk id="128" creationId="{2FF7584B-44F4-AC4F-1A2B-A5EEAC3183AF}"/>
+          </ac:cxnSpMkLst>
+        </pc:cxnChg>
+      </pc:sldChg>
+    </pc:docChg>
+  </pc:docChgLst>
+</pc:chgInfo>
+</file>
+
 <file path=ppt/slideLayouts/slideLayout1.xml><?xml version="1.0" encoding="utf-8"?>
 <p:sldLayout xmlns:a="http://schemas.openxmlformats.org/drawingml/2006/main" xmlns:r="http://schemas.openxmlformats.org/officeDocument/2006/relationships" xmlns:p="http://schemas.openxmlformats.org/presentationml/2006/main" type="title" preserve="1">
   <p:cSld name="Title Slide">
@@ -259,7 +384,7 @@
           <a:p>
             <a:fld id="{51AFF834-1BEC-4F95-9622-28B5DCC1FE16}" type="datetimeFigureOut">
               <a:rPr lang="en-US" smtClean="0"/>
-              <a:t>7/1/2025</a:t>
+              <a:t>3/5/2026</a:t>
             </a:fld>
             <a:endParaRPr lang="en-US"/>
           </a:p>
@@ -457,7 +582,7 @@
           <a:p>
             <a:fld id="{51AFF834-1BEC-4F95-9622-28B5DCC1FE16}" type="datetimeFigureOut">
               <a:rPr lang="en-US" smtClean="0"/>
-              <a:t>7/1/2025</a:t>
+              <a:t>3/5/2026</a:t>
             </a:fld>
             <a:endParaRPr lang="en-US"/>
           </a:p>
@@ -665,7 +790,7 @@
           <a:p>
             <a:fld id="{51AFF834-1BEC-4F95-9622-28B5DCC1FE16}" type="datetimeFigureOut">
               <a:rPr lang="en-US" smtClean="0"/>
-              <a:t>7/1/2025</a:t>
+              <a:t>3/5/2026</a:t>
             </a:fld>
             <a:endParaRPr lang="en-US"/>
           </a:p>
@@ -863,7 +988,7 @@
           <a:p>
             <a:fld id="{51AFF834-1BEC-4F95-9622-28B5DCC1FE16}" type="datetimeFigureOut">
               <a:rPr lang="en-US" smtClean="0"/>
-              <a:t>7/1/2025</a:t>
+              <a:t>3/5/2026</a:t>
             </a:fld>
             <a:endParaRPr lang="en-US"/>
           </a:p>
@@ -1138,7 +1263,7 @@
           <a:p>
             <a:fld id="{51AFF834-1BEC-4F95-9622-28B5DCC1FE16}" type="datetimeFigureOut">
               <a:rPr lang="en-US" smtClean="0"/>
-              <a:t>7/1/2025</a:t>
+              <a:t>3/5/2026</a:t>
             </a:fld>
             <a:endParaRPr lang="en-US"/>
           </a:p>
@@ -1403,7 +1528,7 @@
           <a:p>
             <a:fld id="{51AFF834-1BEC-4F95-9622-28B5DCC1FE16}" type="datetimeFigureOut">
               <a:rPr lang="en-US" smtClean="0"/>
-              <a:t>7/1/2025</a:t>
+              <a:t>3/5/2026</a:t>
             </a:fld>
             <a:endParaRPr lang="en-US"/>
           </a:p>
@@ -1815,7 +1940,7 @@
           <a:p>
             <a:fld id="{51AFF834-1BEC-4F95-9622-28B5DCC1FE16}" type="datetimeFigureOut">
               <a:rPr lang="en-US" smtClean="0"/>
-              <a:t>7/1/2025</a:t>
+              <a:t>3/5/2026</a:t>
             </a:fld>
             <a:endParaRPr lang="en-US"/>
           </a:p>
@@ -1956,7 +2081,7 @@
           <a:p>
             <a:fld id="{51AFF834-1BEC-4F95-9622-28B5DCC1FE16}" type="datetimeFigureOut">
               <a:rPr lang="en-US" smtClean="0"/>
-              <a:t>7/1/2025</a:t>
+              <a:t>3/5/2026</a:t>
             </a:fld>
             <a:endParaRPr lang="en-US"/>
           </a:p>
@@ -2069,7 +2194,7 @@
           <a:p>
             <a:fld id="{51AFF834-1BEC-4F95-9622-28B5DCC1FE16}" type="datetimeFigureOut">
               <a:rPr lang="en-US" smtClean="0"/>
-              <a:t>7/1/2025</a:t>
+              <a:t>3/5/2026</a:t>
             </a:fld>
             <a:endParaRPr lang="en-US"/>
           </a:p>
@@ -2380,7 +2505,7 @@
           <a:p>
             <a:fld id="{51AFF834-1BEC-4F95-9622-28B5DCC1FE16}" type="datetimeFigureOut">
               <a:rPr lang="en-US" smtClean="0"/>
-              <a:t>7/1/2025</a:t>
+              <a:t>3/5/2026</a:t>
             </a:fld>
             <a:endParaRPr lang="en-US"/>
           </a:p>
@@ -2668,7 +2793,7 @@
           <a:p>
             <a:fld id="{51AFF834-1BEC-4F95-9622-28B5DCC1FE16}" type="datetimeFigureOut">
               <a:rPr lang="en-US" smtClean="0"/>
-              <a:t>7/1/2025</a:t>
+              <a:t>3/5/2026</a:t>
             </a:fld>
             <a:endParaRPr lang="en-US"/>
           </a:p>
@@ -2909,7 +3034,7 @@
           <a:p>
             <a:fld id="{51AFF834-1BEC-4F95-9622-28B5DCC1FE16}" type="datetimeFigureOut">
               <a:rPr lang="en-US" smtClean="0"/>
-              <a:t>7/1/2025</a:t>
+              <a:t>3/5/2026</a:t>
             </a:fld>
             <a:endParaRPr lang="en-US"/>
           </a:p>
@@ -3326,6 +3451,36 @@
           <a:chExt cx="0" cy="0"/>
         </a:xfrm>
       </p:grpSpPr>
+      <p:pic>
+        <p:nvPicPr>
+          <p:cNvPr id="36" name="Picture 35">
+            <a:extLst>
+              <a:ext uri="{FF2B5EF4-FFF2-40B4-BE49-F238E27FC236}">
+                <a16:creationId xmlns:a16="http://schemas.microsoft.com/office/drawing/2014/main" id="{7D1B8B85-7F90-6201-21E9-F6ABDFFBBFF8}"/>
+              </a:ext>
+            </a:extLst>
+          </p:cNvPr>
+          <p:cNvPicPr>
+            <a:picLocks noChangeAspect="1"/>
+          </p:cNvPicPr>
+          <p:nvPr/>
+        </p:nvPicPr>
+        <p:blipFill>
+          <a:blip r:embed="rId2"/>
+          <a:stretch>
+            <a:fillRect/>
+          </a:stretch>
+        </p:blipFill>
+        <p:spPr>
+          <a:xfrm>
+            <a:off x="2899612" y="3237305"/>
+            <a:ext cx="503999" cy="267608"/>
+          </a:xfrm>
+          <a:prstGeom prst="rect">
+            <a:avLst/>
+          </a:prstGeom>
+        </p:spPr>
+      </p:pic>
       <p:sp>
         <p:nvSpPr>
           <p:cNvPr id="4" name="TextBox 3">
@@ -3364,7 +3519,7 @@
             <a:pPr algn="ctr"/>
             <a:r>
               <a:rPr lang="en-US" sz="1200" b="1" dirty="0"/>
-              <a:t>Stall Detection</a:t>
+              <a:t>NOPs to prevent hazards</a:t>
             </a:r>
           </a:p>
         </p:txBody>
@@ -5788,48 +5943,6 @@
           </a:fontRef>
         </p:style>
       </p:cxnSp>
-      <p:cxnSp>
-        <p:nvCxnSpPr>
-          <p:cNvPr id="105" name="Straight Arrow Connector 104">
-            <a:extLst>
-              <a:ext uri="{FF2B5EF4-FFF2-40B4-BE49-F238E27FC236}">
-                <a16:creationId xmlns:a16="http://schemas.microsoft.com/office/drawing/2014/main" id="{96194351-1F6F-6ECD-551A-2B077972FE1F}"/>
-              </a:ext>
-            </a:extLst>
-          </p:cNvPr>
-          <p:cNvCxnSpPr/>
-          <p:nvPr/>
-        </p:nvCxnSpPr>
-        <p:spPr>
-          <a:xfrm>
-            <a:off x="3216369" y="3387564"/>
-            <a:ext cx="177808" cy="0"/>
-          </a:xfrm>
-          <a:prstGeom prst="straightConnector1">
-            <a:avLst/>
-          </a:prstGeom>
-          <a:ln>
-            <a:solidFill>
-              <a:srgbClr val="FF0000"/>
-            </a:solidFill>
-            <a:tailEnd type="triangle"/>
-          </a:ln>
-        </p:spPr>
-        <p:style>
-          <a:lnRef idx="2">
-            <a:schemeClr val="accent1"/>
-          </a:lnRef>
-          <a:fillRef idx="0">
-            <a:schemeClr val="accent1"/>
-          </a:fillRef>
-          <a:effectRef idx="1">
-            <a:schemeClr val="accent1"/>
-          </a:effectRef>
-          <a:fontRef idx="minor">
-            <a:schemeClr val="tx1"/>
-          </a:fontRef>
-        </p:style>
-      </p:cxnSp>
       <p:sp>
         <p:nvSpPr>
           <p:cNvPr id="111" name="Rectangle 110">
@@ -6367,213 +6480,12 @@
           </a:fontRef>
         </p:style>
       </p:cxnSp>
-      <p:sp>
-        <p:nvSpPr>
-          <p:cNvPr id="145" name="Rectangle 144">
-            <a:extLst>
-              <a:ext uri="{FF2B5EF4-FFF2-40B4-BE49-F238E27FC236}">
-                <a16:creationId xmlns:a16="http://schemas.microsoft.com/office/drawing/2014/main" id="{D48BF948-61BF-AC37-8597-388094170D18}"/>
-              </a:ext>
-            </a:extLst>
-          </p:cNvPr>
-          <p:cNvSpPr/>
-          <p:nvPr/>
-        </p:nvSpPr>
-        <p:spPr>
-          <a:xfrm>
-            <a:off x="8073953" y="3976514"/>
-            <a:ext cx="865785" cy="1056594"/>
-          </a:xfrm>
-          <a:prstGeom prst="rect">
-            <a:avLst/>
-          </a:prstGeom>
-          <a:solidFill>
-            <a:schemeClr val="bg1"/>
-          </a:solidFill>
-        </p:spPr>
-        <p:style>
-          <a:lnRef idx="2">
-            <a:schemeClr val="accent1">
-              <a:shade val="15000"/>
-            </a:schemeClr>
-          </a:lnRef>
-          <a:fillRef idx="1">
-            <a:schemeClr val="accent1"/>
-          </a:fillRef>
-          <a:effectRef idx="0">
-            <a:schemeClr val="accent1"/>
-          </a:effectRef>
-          <a:fontRef idx="minor">
-            <a:schemeClr val="lt1"/>
-          </a:fontRef>
-        </p:style>
-        <p:txBody>
-          <a:bodyPr rtlCol="0" anchor="ctr"/>
-          <a:lstStyle/>
-          <a:p>
-            <a:pPr algn="ctr"/>
-            <a:r>
-              <a:rPr lang="en-US" dirty="0"/>
-              <a:t>PC</a:t>
-            </a:r>
-          </a:p>
-        </p:txBody>
-      </p:sp>
-      <p:sp>
-        <p:nvSpPr>
-          <p:cNvPr id="146" name="TextBox 145">
-            <a:extLst>
-              <a:ext uri="{FF2B5EF4-FFF2-40B4-BE49-F238E27FC236}">
-                <a16:creationId xmlns:a16="http://schemas.microsoft.com/office/drawing/2014/main" id="{69719632-7E59-F7B2-AEF4-E4C30AA0AEF2}"/>
-              </a:ext>
-            </a:extLst>
-          </p:cNvPr>
-          <p:cNvSpPr txBox="1"/>
-          <p:nvPr/>
-        </p:nvSpPr>
-        <p:spPr>
-          <a:xfrm>
-            <a:off x="8252423" y="3945511"/>
-            <a:ext cx="527709" cy="400110"/>
-          </a:xfrm>
-          <a:prstGeom prst="rect">
-            <a:avLst/>
-          </a:prstGeom>
-          <a:noFill/>
-        </p:spPr>
-        <p:txBody>
-          <a:bodyPr wrap="none" rtlCol="0">
-            <a:spAutoFit/>
-          </a:bodyPr>
-          <a:lstStyle/>
-          <a:p>
-            <a:pPr algn="ctr"/>
-            <a:r>
-              <a:rPr lang="en-US" sz="1000" dirty="0"/>
-              <a:t>Offset</a:t>
-            </a:r>
-          </a:p>
-          <a:p>
-            <a:pPr algn="ctr"/>
-            <a:endParaRPr lang="en-US" sz="1000" dirty="0"/>
-          </a:p>
-        </p:txBody>
-      </p:sp>
-      <p:sp>
-        <p:nvSpPr>
-          <p:cNvPr id="148" name="TextBox 147">
-            <a:extLst>
-              <a:ext uri="{FF2B5EF4-FFF2-40B4-BE49-F238E27FC236}">
-                <a16:creationId xmlns:a16="http://schemas.microsoft.com/office/drawing/2014/main" id="{6432B689-7D1C-F807-6B45-D8272427DA3A}"/>
-              </a:ext>
-            </a:extLst>
-          </p:cNvPr>
-          <p:cNvSpPr txBox="1"/>
-          <p:nvPr/>
-        </p:nvSpPr>
-        <p:spPr>
-          <a:xfrm>
-            <a:off x="8023507" y="4194029"/>
-            <a:ext cx="413896" cy="230832"/>
-          </a:xfrm>
-          <a:prstGeom prst="rect">
-            <a:avLst/>
-          </a:prstGeom>
-          <a:noFill/>
-        </p:spPr>
-        <p:txBody>
-          <a:bodyPr wrap="none" rtlCol="0">
-            <a:spAutoFit/>
-          </a:bodyPr>
-          <a:lstStyle/>
-          <a:p>
-            <a:pPr algn="ctr"/>
-            <a:r>
-              <a:rPr lang="en-US" sz="900" dirty="0"/>
-              <a:t>NPC</a:t>
-            </a:r>
-          </a:p>
-        </p:txBody>
-      </p:sp>
-      <p:sp>
-        <p:nvSpPr>
-          <p:cNvPr id="149" name="TextBox 148">
-            <a:extLst>
-              <a:ext uri="{FF2B5EF4-FFF2-40B4-BE49-F238E27FC236}">
-                <a16:creationId xmlns:a16="http://schemas.microsoft.com/office/drawing/2014/main" id="{831B5896-D57B-4667-02CD-6AAF11DEE5E2}"/>
-              </a:ext>
-            </a:extLst>
-          </p:cNvPr>
-          <p:cNvSpPr txBox="1"/>
-          <p:nvPr/>
-        </p:nvSpPr>
-        <p:spPr>
-          <a:xfrm>
-            <a:off x="8037782" y="4384148"/>
-            <a:ext cx="407484" cy="230832"/>
-          </a:xfrm>
-          <a:prstGeom prst="rect">
-            <a:avLst/>
-          </a:prstGeom>
-          <a:noFill/>
-        </p:spPr>
-        <p:txBody>
-          <a:bodyPr wrap="none" rtlCol="0">
-            <a:spAutoFit/>
-          </a:bodyPr>
-          <a:lstStyle/>
-          <a:p>
-            <a:pPr algn="ctr"/>
-            <a:r>
-              <a:rPr lang="en-US" sz="900" dirty="0" err="1"/>
-              <a:t>imm</a:t>
-            </a:r>
-            <a:endParaRPr lang="en-US" sz="900" dirty="0"/>
-          </a:p>
-        </p:txBody>
-      </p:sp>
-      <p:sp>
-        <p:nvSpPr>
-          <p:cNvPr id="151" name="TextBox 150">
-            <a:extLst>
-              <a:ext uri="{FF2B5EF4-FFF2-40B4-BE49-F238E27FC236}">
-                <a16:creationId xmlns:a16="http://schemas.microsoft.com/office/drawing/2014/main" id="{BC6DDD09-EA41-1470-2429-DBE27164913F}"/>
-              </a:ext>
-            </a:extLst>
-          </p:cNvPr>
-          <p:cNvSpPr txBox="1"/>
-          <p:nvPr/>
-        </p:nvSpPr>
-        <p:spPr>
-          <a:xfrm>
-            <a:off x="8224994" y="4611234"/>
-            <a:ext cx="713658" cy="230832"/>
-          </a:xfrm>
-          <a:prstGeom prst="rect">
-            <a:avLst/>
-          </a:prstGeom>
-          <a:noFill/>
-        </p:spPr>
-        <p:txBody>
-          <a:bodyPr wrap="none" rtlCol="0">
-            <a:spAutoFit/>
-          </a:bodyPr>
-          <a:lstStyle/>
-          <a:p>
-            <a:pPr algn="ctr"/>
-            <a:r>
-              <a:rPr lang="en-US" sz="900" dirty="0"/>
-              <a:t>Branch PC</a:t>
-            </a:r>
-          </a:p>
-        </p:txBody>
-      </p:sp>
       <p:cxnSp>
         <p:nvCxnSpPr>
-          <p:cNvPr id="152" name="Straight Arrow Connector 151">
-            <a:extLst>
-              <a:ext uri="{FF2B5EF4-FFF2-40B4-BE49-F238E27FC236}">
-                <a16:creationId xmlns:a16="http://schemas.microsoft.com/office/drawing/2014/main" id="{0B969FF2-6DAD-23DC-28B8-ACF737E02DB2}"/>
+          <p:cNvPr id="158" name="Straight Connector 157">
+            <a:extLst>
+              <a:ext uri="{FF2B5EF4-FFF2-40B4-BE49-F238E27FC236}">
+                <a16:creationId xmlns:a16="http://schemas.microsoft.com/office/drawing/2014/main" id="{1691EF3B-B49C-E8C7-89F0-04E2CEA7B43B}"/>
               </a:ext>
             </a:extLst>
           </p:cNvPr>
@@ -6584,15 +6496,12 @@
         </p:nvCxnSpPr>
         <p:spPr>
           <a:xfrm>
-            <a:off x="8937730" y="4726650"/>
-            <a:ext cx="374301" cy="0"/>
-          </a:xfrm>
-          <a:prstGeom prst="straightConnector1">
-            <a:avLst/>
-          </a:prstGeom>
-          <a:ln>
-            <a:tailEnd type="triangle"/>
-          </a:ln>
+            <a:off x="2639349" y="3251607"/>
+            <a:ext cx="0" cy="1014753"/>
+          </a:xfrm>
+          <a:prstGeom prst="line">
+            <a:avLst/>
+          </a:prstGeom>
         </p:spPr>
         <p:style>
           <a:lnRef idx="2">
@@ -6609,272 +6518,6 @@
           </a:fontRef>
         </p:style>
       </p:cxnSp>
-      <p:cxnSp>
-        <p:nvCxnSpPr>
-          <p:cNvPr id="153" name="Straight Arrow Connector 152">
-            <a:extLst>
-              <a:ext uri="{FF2B5EF4-FFF2-40B4-BE49-F238E27FC236}">
-                <a16:creationId xmlns:a16="http://schemas.microsoft.com/office/drawing/2014/main" id="{F030B5C6-68FA-2DA5-919A-5B353DA9C1A8}"/>
-              </a:ext>
-            </a:extLst>
-          </p:cNvPr>
-          <p:cNvCxnSpPr/>
-          <p:nvPr/>
-        </p:nvCxnSpPr>
-        <p:spPr>
-          <a:xfrm>
-            <a:off x="7896145" y="4306947"/>
-            <a:ext cx="177808" cy="0"/>
-          </a:xfrm>
-          <a:prstGeom prst="straightConnector1">
-            <a:avLst/>
-          </a:prstGeom>
-          <a:ln>
-            <a:tailEnd type="triangle"/>
-          </a:ln>
-        </p:spPr>
-        <p:style>
-          <a:lnRef idx="2">
-            <a:schemeClr val="accent1"/>
-          </a:lnRef>
-          <a:fillRef idx="0">
-            <a:schemeClr val="accent1"/>
-          </a:fillRef>
-          <a:effectRef idx="1">
-            <a:schemeClr val="accent1"/>
-          </a:effectRef>
-          <a:fontRef idx="minor">
-            <a:schemeClr val="tx1"/>
-          </a:fontRef>
-        </p:style>
-      </p:cxnSp>
-      <p:cxnSp>
-        <p:nvCxnSpPr>
-          <p:cNvPr id="154" name="Straight Arrow Connector 153">
-            <a:extLst>
-              <a:ext uri="{FF2B5EF4-FFF2-40B4-BE49-F238E27FC236}">
-                <a16:creationId xmlns:a16="http://schemas.microsoft.com/office/drawing/2014/main" id="{9779A5A3-D9AC-4884-E09E-088355A5273D}"/>
-              </a:ext>
-            </a:extLst>
-          </p:cNvPr>
-          <p:cNvCxnSpPr/>
-          <p:nvPr/>
-        </p:nvCxnSpPr>
-        <p:spPr>
-          <a:xfrm>
-            <a:off x="7896145" y="4507267"/>
-            <a:ext cx="177808" cy="0"/>
-          </a:xfrm>
-          <a:prstGeom prst="straightConnector1">
-            <a:avLst/>
-          </a:prstGeom>
-          <a:ln>
-            <a:tailEnd type="triangle"/>
-          </a:ln>
-        </p:spPr>
-        <p:style>
-          <a:lnRef idx="2">
-            <a:schemeClr val="accent1"/>
-          </a:lnRef>
-          <a:fillRef idx="0">
-            <a:schemeClr val="accent1"/>
-          </a:fillRef>
-          <a:effectRef idx="1">
-            <a:schemeClr val="accent1"/>
-          </a:effectRef>
-          <a:fontRef idx="minor">
-            <a:schemeClr val="tx1"/>
-          </a:fontRef>
-        </p:style>
-      </p:cxnSp>
-      <p:sp>
-        <p:nvSpPr>
-          <p:cNvPr id="155" name="TextBox 154">
-            <a:extLst>
-              <a:ext uri="{FF2B5EF4-FFF2-40B4-BE49-F238E27FC236}">
-                <a16:creationId xmlns:a16="http://schemas.microsoft.com/office/drawing/2014/main" id="{75FA3F6B-D94A-A494-28FD-7D4F921979A2}"/>
-              </a:ext>
-            </a:extLst>
-          </p:cNvPr>
-          <p:cNvSpPr txBox="1"/>
-          <p:nvPr/>
-        </p:nvSpPr>
-        <p:spPr>
-          <a:xfrm>
-            <a:off x="8311407" y="4765177"/>
-            <a:ext cx="620684" cy="230832"/>
-          </a:xfrm>
-          <a:prstGeom prst="rect">
-            <a:avLst/>
-          </a:prstGeom>
-          <a:noFill/>
-        </p:spPr>
-        <p:txBody>
-          <a:bodyPr wrap="none" rtlCol="0">
-            <a:spAutoFit/>
-          </a:bodyPr>
-          <a:lstStyle/>
-          <a:p>
-            <a:pPr algn="ctr"/>
-            <a:r>
-              <a:rPr lang="en-US" sz="900" dirty="0"/>
-              <a:t>Jump PC</a:t>
-            </a:r>
-          </a:p>
-        </p:txBody>
-      </p:sp>
-      <p:cxnSp>
-        <p:nvCxnSpPr>
-          <p:cNvPr id="156" name="Straight Arrow Connector 155">
-            <a:extLst>
-              <a:ext uri="{FF2B5EF4-FFF2-40B4-BE49-F238E27FC236}">
-                <a16:creationId xmlns:a16="http://schemas.microsoft.com/office/drawing/2014/main" id="{4E8E377D-848A-C4CD-E531-28E5114DF352}"/>
-              </a:ext>
-            </a:extLst>
-          </p:cNvPr>
-          <p:cNvCxnSpPr>
-            <a:cxnSpLocks/>
-          </p:cNvCxnSpPr>
-          <p:nvPr/>
-        </p:nvCxnSpPr>
-        <p:spPr>
-          <a:xfrm>
-            <a:off x="8937730" y="4895500"/>
-            <a:ext cx="379410" cy="0"/>
-          </a:xfrm>
-          <a:prstGeom prst="straightConnector1">
-            <a:avLst/>
-          </a:prstGeom>
-          <a:ln>
-            <a:tailEnd type="triangle"/>
-          </a:ln>
-        </p:spPr>
-        <p:style>
-          <a:lnRef idx="2">
-            <a:schemeClr val="accent1"/>
-          </a:lnRef>
-          <a:fillRef idx="0">
-            <a:schemeClr val="accent1"/>
-          </a:fillRef>
-          <a:effectRef idx="1">
-            <a:schemeClr val="accent1"/>
-          </a:effectRef>
-          <a:fontRef idx="minor">
-            <a:schemeClr val="tx1"/>
-          </a:fontRef>
-        </p:style>
-      </p:cxnSp>
-      <p:cxnSp>
-        <p:nvCxnSpPr>
-          <p:cNvPr id="158" name="Straight Connector 157">
-            <a:extLst>
-              <a:ext uri="{FF2B5EF4-FFF2-40B4-BE49-F238E27FC236}">
-                <a16:creationId xmlns:a16="http://schemas.microsoft.com/office/drawing/2014/main" id="{1691EF3B-B49C-E8C7-89F0-04E2CEA7B43B}"/>
-              </a:ext>
-            </a:extLst>
-          </p:cNvPr>
-          <p:cNvCxnSpPr>
-            <a:cxnSpLocks/>
-          </p:cNvCxnSpPr>
-          <p:nvPr/>
-        </p:nvCxnSpPr>
-        <p:spPr>
-          <a:xfrm>
-            <a:off x="2639349" y="3251607"/>
-            <a:ext cx="0" cy="1014753"/>
-          </a:xfrm>
-          <a:prstGeom prst="line">
-            <a:avLst/>
-          </a:prstGeom>
-        </p:spPr>
-        <p:style>
-          <a:lnRef idx="2">
-            <a:schemeClr val="accent1"/>
-          </a:lnRef>
-          <a:fillRef idx="0">
-            <a:schemeClr val="accent1"/>
-          </a:fillRef>
-          <a:effectRef idx="1">
-            <a:schemeClr val="accent1"/>
-          </a:effectRef>
-          <a:fontRef idx="minor">
-            <a:schemeClr val="tx1"/>
-          </a:fontRef>
-        </p:style>
-      </p:cxnSp>
-      <p:sp>
-        <p:nvSpPr>
-          <p:cNvPr id="160" name="TextBox 159">
-            <a:extLst>
-              <a:ext uri="{FF2B5EF4-FFF2-40B4-BE49-F238E27FC236}">
-                <a16:creationId xmlns:a16="http://schemas.microsoft.com/office/drawing/2014/main" id="{3BF5B236-4D8B-849D-0CDF-2CB1B5EE7284}"/>
-              </a:ext>
-            </a:extLst>
-          </p:cNvPr>
-          <p:cNvSpPr txBox="1"/>
-          <p:nvPr/>
-        </p:nvSpPr>
-        <p:spPr>
-          <a:xfrm>
-            <a:off x="7559719" y="4194029"/>
-            <a:ext cx="413896" cy="230832"/>
-          </a:xfrm>
-          <a:prstGeom prst="rect">
-            <a:avLst/>
-          </a:prstGeom>
-          <a:noFill/>
-        </p:spPr>
-        <p:txBody>
-          <a:bodyPr wrap="none" rtlCol="0">
-            <a:spAutoFit/>
-          </a:bodyPr>
-          <a:lstStyle/>
-          <a:p>
-            <a:pPr algn="ctr"/>
-            <a:r>
-              <a:rPr lang="en-US" sz="900" dirty="0"/>
-              <a:t>NPC</a:t>
-            </a:r>
-          </a:p>
-        </p:txBody>
-      </p:sp>
-      <p:sp>
-        <p:nvSpPr>
-          <p:cNvPr id="161" name="TextBox 160">
-            <a:extLst>
-              <a:ext uri="{FF2B5EF4-FFF2-40B4-BE49-F238E27FC236}">
-                <a16:creationId xmlns:a16="http://schemas.microsoft.com/office/drawing/2014/main" id="{0E9784F2-B3AB-C0FA-FDFE-48C83AB9B12E}"/>
-              </a:ext>
-            </a:extLst>
-          </p:cNvPr>
-          <p:cNvSpPr txBox="1"/>
-          <p:nvPr/>
-        </p:nvSpPr>
-        <p:spPr>
-          <a:xfrm>
-            <a:off x="7553125" y="4380402"/>
-            <a:ext cx="407484" cy="230832"/>
-          </a:xfrm>
-          <a:prstGeom prst="rect">
-            <a:avLst/>
-          </a:prstGeom>
-          <a:noFill/>
-        </p:spPr>
-        <p:txBody>
-          <a:bodyPr wrap="none" rtlCol="0">
-            <a:spAutoFit/>
-          </a:bodyPr>
-          <a:lstStyle/>
-          <a:p>
-            <a:pPr algn="ctr"/>
-            <a:r>
-              <a:rPr lang="en-US" sz="900" dirty="0" err="1"/>
-              <a:t>imm</a:t>
-            </a:r>
-            <a:endParaRPr lang="en-US" sz="900" dirty="0"/>
-          </a:p>
-        </p:txBody>
-      </p:sp>
       <p:grpSp>
         <p:nvGrpSpPr>
           <p:cNvPr id="162" name="Group 161">
@@ -8301,48 +7944,6 @@
           </a:fontRef>
         </p:style>
       </p:cxnSp>
-      <p:cxnSp>
-        <p:nvCxnSpPr>
-          <p:cNvPr id="245" name="Straight Arrow Connector 244">
-            <a:extLst>
-              <a:ext uri="{FF2B5EF4-FFF2-40B4-BE49-F238E27FC236}">
-                <a16:creationId xmlns:a16="http://schemas.microsoft.com/office/drawing/2014/main" id="{44285445-3673-F463-34B1-B7F351676027}"/>
-              </a:ext>
-            </a:extLst>
-          </p:cNvPr>
-          <p:cNvCxnSpPr/>
-          <p:nvPr/>
-        </p:nvCxnSpPr>
-        <p:spPr>
-          <a:xfrm flipV="1">
-            <a:off x="8716191" y="2434882"/>
-            <a:ext cx="0" cy="167673"/>
-          </a:xfrm>
-          <a:prstGeom prst="straightConnector1">
-            <a:avLst/>
-          </a:prstGeom>
-          <a:ln>
-            <a:solidFill>
-              <a:srgbClr val="FF0000"/>
-            </a:solidFill>
-            <a:tailEnd type="triangle"/>
-          </a:ln>
-        </p:spPr>
-        <p:style>
-          <a:lnRef idx="2">
-            <a:schemeClr val="accent1"/>
-          </a:lnRef>
-          <a:fillRef idx="0">
-            <a:schemeClr val="accent1"/>
-          </a:fillRef>
-          <a:effectRef idx="1">
-            <a:schemeClr val="accent1"/>
-          </a:effectRef>
-          <a:fontRef idx="minor">
-            <a:schemeClr val="tx1"/>
-          </a:fontRef>
-        </p:style>
-      </p:cxnSp>
       <p:grpSp>
         <p:nvGrpSpPr>
           <p:cNvPr id="247" name="Group 246">
@@ -8773,125 +8374,6 @@
       </p:sp>
       <p:cxnSp>
         <p:nvCxnSpPr>
-          <p:cNvPr id="269" name="Straight Arrow Connector 268">
-            <a:extLst>
-              <a:ext uri="{FF2B5EF4-FFF2-40B4-BE49-F238E27FC236}">
-                <a16:creationId xmlns:a16="http://schemas.microsoft.com/office/drawing/2014/main" id="{87860765-22E8-2DBF-0155-43937E1810EB}"/>
-              </a:ext>
-            </a:extLst>
-          </p:cNvPr>
-          <p:cNvCxnSpPr>
-            <a:cxnSpLocks/>
-          </p:cNvCxnSpPr>
-          <p:nvPr/>
-        </p:nvCxnSpPr>
-        <p:spPr>
-          <a:xfrm flipV="1">
-            <a:off x="9204837" y="4520967"/>
-            <a:ext cx="100338" cy="2498"/>
-          </a:xfrm>
-          <a:prstGeom prst="straightConnector1">
-            <a:avLst/>
-          </a:prstGeom>
-          <a:ln>
-            <a:tailEnd type="triangle"/>
-          </a:ln>
-        </p:spPr>
-        <p:style>
-          <a:lnRef idx="2">
-            <a:schemeClr val="accent1"/>
-          </a:lnRef>
-          <a:fillRef idx="0">
-            <a:schemeClr val="accent1"/>
-          </a:fillRef>
-          <a:effectRef idx="1">
-            <a:schemeClr val="accent1"/>
-          </a:effectRef>
-          <a:fontRef idx="minor">
-            <a:schemeClr val="tx1"/>
-          </a:fontRef>
-        </p:style>
-      </p:cxnSp>
-      <p:sp>
-        <p:nvSpPr>
-          <p:cNvPr id="270" name="TextBox 269">
-            <a:extLst>
-              <a:ext uri="{FF2B5EF4-FFF2-40B4-BE49-F238E27FC236}">
-                <a16:creationId xmlns:a16="http://schemas.microsoft.com/office/drawing/2014/main" id="{E335D321-53C8-872A-430E-7732E67F0A79}"/>
-              </a:ext>
-            </a:extLst>
-          </p:cNvPr>
-          <p:cNvSpPr txBox="1"/>
-          <p:nvPr/>
-        </p:nvSpPr>
-        <p:spPr>
-          <a:xfrm>
-            <a:off x="8882744" y="4402632"/>
-            <a:ext cx="413896" cy="230832"/>
-          </a:xfrm>
-          <a:prstGeom prst="rect">
-            <a:avLst/>
-          </a:prstGeom>
-          <a:noFill/>
-        </p:spPr>
-        <p:txBody>
-          <a:bodyPr wrap="none" rtlCol="0">
-            <a:spAutoFit/>
-          </a:bodyPr>
-          <a:lstStyle/>
-          <a:p>
-            <a:pPr algn="ctr"/>
-            <a:r>
-              <a:rPr lang="en-US" sz="900" dirty="0"/>
-              <a:t>NPC</a:t>
-            </a:r>
-          </a:p>
-        </p:txBody>
-      </p:sp>
-      <p:cxnSp>
-        <p:nvCxnSpPr>
-          <p:cNvPr id="275" name="Straight Arrow Connector 274">
-            <a:extLst>
-              <a:ext uri="{FF2B5EF4-FFF2-40B4-BE49-F238E27FC236}">
-                <a16:creationId xmlns:a16="http://schemas.microsoft.com/office/drawing/2014/main" id="{FF5E826E-C5DA-266A-3DEA-9D97594449EE}"/>
-              </a:ext>
-            </a:extLst>
-          </p:cNvPr>
-          <p:cNvCxnSpPr/>
-          <p:nvPr/>
-        </p:nvCxnSpPr>
-        <p:spPr>
-          <a:xfrm>
-            <a:off x="9506818" y="4099798"/>
-            <a:ext cx="0" cy="230832"/>
-          </a:xfrm>
-          <a:prstGeom prst="straightConnector1">
-            <a:avLst/>
-          </a:prstGeom>
-          <a:ln>
-            <a:solidFill>
-              <a:srgbClr val="FF0000"/>
-            </a:solidFill>
-            <a:tailEnd type="triangle"/>
-          </a:ln>
-        </p:spPr>
-        <p:style>
-          <a:lnRef idx="2">
-            <a:schemeClr val="accent1"/>
-          </a:lnRef>
-          <a:fillRef idx="0">
-            <a:schemeClr val="accent1"/>
-          </a:fillRef>
-          <a:effectRef idx="1">
-            <a:schemeClr val="accent1"/>
-          </a:effectRef>
-          <a:fontRef idx="minor">
-            <a:schemeClr val="tx1"/>
-          </a:fontRef>
-        </p:style>
-      </p:cxnSp>
-      <p:cxnSp>
-        <p:nvCxnSpPr>
           <p:cNvPr id="276" name="Straight Arrow Connector 275">
             <a:extLst>
               <a:ext uri="{FF2B5EF4-FFF2-40B4-BE49-F238E27FC236}">
@@ -9571,50 +9053,6 @@
       </p:sp>
       <p:cxnSp>
         <p:nvCxnSpPr>
-          <p:cNvPr id="315" name="Straight Arrow Connector 314">
-            <a:extLst>
-              <a:ext uri="{FF2B5EF4-FFF2-40B4-BE49-F238E27FC236}">
-                <a16:creationId xmlns:a16="http://schemas.microsoft.com/office/drawing/2014/main" id="{CC2E6CF6-7F9B-DF2E-8401-A11C6FFE7D1D}"/>
-              </a:ext>
-            </a:extLst>
-          </p:cNvPr>
-          <p:cNvCxnSpPr>
-            <a:cxnSpLocks/>
-          </p:cNvCxnSpPr>
-          <p:nvPr/>
-        </p:nvCxnSpPr>
-        <p:spPr>
-          <a:xfrm flipV="1">
-            <a:off x="10852467" y="3154000"/>
-            <a:ext cx="0" cy="195214"/>
-          </a:xfrm>
-          <a:prstGeom prst="straightConnector1">
-            <a:avLst/>
-          </a:prstGeom>
-          <a:ln>
-            <a:solidFill>
-              <a:srgbClr val="FF0000"/>
-            </a:solidFill>
-            <a:tailEnd type="triangle"/>
-          </a:ln>
-        </p:spPr>
-        <p:style>
-          <a:lnRef idx="2">
-            <a:schemeClr val="accent1"/>
-          </a:lnRef>
-          <a:fillRef idx="0">
-            <a:schemeClr val="accent1"/>
-          </a:fillRef>
-          <a:effectRef idx="1">
-            <a:schemeClr val="accent1"/>
-          </a:effectRef>
-          <a:fontRef idx="minor">
-            <a:schemeClr val="tx1"/>
-          </a:fontRef>
-        </p:style>
-      </p:cxnSp>
-      <p:cxnSp>
-        <p:nvCxnSpPr>
           <p:cNvPr id="316" name="Straight Connector 315">
             <a:extLst>
               <a:ext uri="{FF2B5EF4-FFF2-40B4-BE49-F238E27FC236}">
@@ -10243,8 +9681,8 @@
         </p:nvSpPr>
         <p:spPr>
           <a:xfrm>
-            <a:off x="2458495" y="983375"/>
-            <a:ext cx="142681" cy="3600425"/>
+            <a:off x="2458496" y="983375"/>
+            <a:ext cx="124516" cy="4611756"/>
           </a:xfrm>
           <a:prstGeom prst="rect">
             <a:avLst/>
@@ -10288,107 +9726,12 @@
           </a:p>
         </p:txBody>
       </p:sp>
-      <p:sp>
-        <p:nvSpPr>
-          <p:cNvPr id="17" name="Rectangle 16">
-            <a:extLst>
-              <a:ext uri="{FF2B5EF4-FFF2-40B4-BE49-F238E27FC236}">
-                <a16:creationId xmlns:a16="http://schemas.microsoft.com/office/drawing/2014/main" id="{4480F685-AE09-0D32-5539-8E4975E6DF53}"/>
-              </a:ext>
-            </a:extLst>
-          </p:cNvPr>
-          <p:cNvSpPr/>
-          <p:nvPr/>
-        </p:nvSpPr>
-        <p:spPr>
-          <a:xfrm>
-            <a:off x="4112869" y="5087156"/>
-            <a:ext cx="663423" cy="460640"/>
-          </a:xfrm>
-          <a:prstGeom prst="rect">
-            <a:avLst/>
-          </a:prstGeom>
-          <a:solidFill>
-            <a:schemeClr val="bg1"/>
-          </a:solidFill>
-        </p:spPr>
-        <p:style>
-          <a:lnRef idx="2">
-            <a:schemeClr val="accent1">
-              <a:shade val="15000"/>
-            </a:schemeClr>
-          </a:lnRef>
-          <a:fillRef idx="1">
-            <a:schemeClr val="accent1"/>
-          </a:fillRef>
-          <a:effectRef idx="0">
-            <a:schemeClr val="accent1"/>
-          </a:effectRef>
-          <a:fontRef idx="minor">
-            <a:schemeClr val="lt1"/>
-          </a:fontRef>
-        </p:style>
-        <p:txBody>
-          <a:bodyPr rtlCol="0" anchor="ctr"/>
-          <a:lstStyle/>
-          <a:p>
-            <a:pPr algn="ctr"/>
-            <a:r>
-              <a:rPr lang="en-US" dirty="0"/>
-              <a:t>PC</a:t>
-            </a:r>
-          </a:p>
-        </p:txBody>
-      </p:sp>
-      <p:sp>
-        <p:nvSpPr>
-          <p:cNvPr id="26" name="TextBox 25">
-            <a:extLst>
-              <a:ext uri="{FF2B5EF4-FFF2-40B4-BE49-F238E27FC236}">
-                <a16:creationId xmlns:a16="http://schemas.microsoft.com/office/drawing/2014/main" id="{2AE4C0B7-D9E3-3907-9505-138DB1D14F87}"/>
-              </a:ext>
-            </a:extLst>
-          </p:cNvPr>
-          <p:cNvSpPr txBox="1"/>
-          <p:nvPr/>
-        </p:nvSpPr>
-        <p:spPr>
-          <a:xfrm>
-            <a:off x="4171777" y="5125610"/>
-            <a:ext cx="574196" cy="384721"/>
-          </a:xfrm>
-          <a:prstGeom prst="rect">
-            <a:avLst/>
-          </a:prstGeom>
-          <a:noFill/>
-        </p:spPr>
-        <p:txBody>
-          <a:bodyPr wrap="none" rtlCol="0">
-            <a:spAutoFit/>
-          </a:bodyPr>
-          <a:lstStyle/>
-          <a:p>
-            <a:pPr algn="ctr"/>
-            <a:r>
-              <a:rPr lang="en-US" sz="1000" dirty="0"/>
-              <a:t>Stall</a:t>
-            </a:r>
-          </a:p>
-          <a:p>
-            <a:pPr algn="ctr"/>
-            <a:r>
-              <a:rPr lang="en-US" sz="900" dirty="0"/>
-              <a:t>counter</a:t>
-            </a:r>
-          </a:p>
-        </p:txBody>
-      </p:sp>
       <p:cxnSp>
         <p:nvCxnSpPr>
-          <p:cNvPr id="30" name="Straight Arrow Connector 29">
-            <a:extLst>
-              <a:ext uri="{FF2B5EF4-FFF2-40B4-BE49-F238E27FC236}">
-                <a16:creationId xmlns:a16="http://schemas.microsoft.com/office/drawing/2014/main" id="{0FCEB13D-6178-8B05-6BF7-AA34265C10ED}"/>
+          <p:cNvPr id="17" name="Straight Arrow Connector 16">
+            <a:extLst>
+              <a:ext uri="{FF2B5EF4-FFF2-40B4-BE49-F238E27FC236}">
+                <a16:creationId xmlns:a16="http://schemas.microsoft.com/office/drawing/2014/main" id="{D24E488E-A173-AFA0-3F6A-78FF8CC6952B}"/>
               </a:ext>
             </a:extLst>
           </p:cNvPr>
@@ -10398,9 +9741,9 @@
           <p:nvPr/>
         </p:nvCxnSpPr>
         <p:spPr>
-          <a:xfrm>
-            <a:off x="3882996" y="5224369"/>
-            <a:ext cx="229874" cy="0"/>
+          <a:xfrm flipV="1">
+            <a:off x="10852467" y="3154000"/>
+            <a:ext cx="0" cy="195214"/>
           </a:xfrm>
           <a:prstGeom prst="straightConnector1">
             <a:avLst/>
@@ -10409,142 +9752,6 @@
             <a:solidFill>
               <a:srgbClr val="FF0000"/>
             </a:solidFill>
-            <a:tailEnd type="triangle"/>
-          </a:ln>
-        </p:spPr>
-        <p:style>
-          <a:lnRef idx="2">
-            <a:schemeClr val="accent1"/>
-          </a:lnRef>
-          <a:fillRef idx="0">
-            <a:schemeClr val="accent1"/>
-          </a:fillRef>
-          <a:effectRef idx="1">
-            <a:schemeClr val="accent1"/>
-          </a:effectRef>
-          <a:fontRef idx="minor">
-            <a:schemeClr val="tx1"/>
-          </a:fontRef>
-        </p:style>
-      </p:cxnSp>
-      <p:sp>
-        <p:nvSpPr>
-          <p:cNvPr id="32" name="Rectangle 31">
-            <a:extLst>
-              <a:ext uri="{FF2B5EF4-FFF2-40B4-BE49-F238E27FC236}">
-                <a16:creationId xmlns:a16="http://schemas.microsoft.com/office/drawing/2014/main" id="{5964E24E-8C81-EFE0-AB26-0F6BAD08C8E1}"/>
-              </a:ext>
-            </a:extLst>
-          </p:cNvPr>
-          <p:cNvSpPr/>
-          <p:nvPr/>
-        </p:nvSpPr>
-        <p:spPr>
-          <a:xfrm>
-            <a:off x="3204207" y="5087370"/>
-            <a:ext cx="678789" cy="484706"/>
-          </a:xfrm>
-          <a:prstGeom prst="rect">
-            <a:avLst/>
-          </a:prstGeom>
-          <a:solidFill>
-            <a:schemeClr val="bg1"/>
-          </a:solidFill>
-        </p:spPr>
-        <p:style>
-          <a:lnRef idx="2">
-            <a:schemeClr val="accent1">
-              <a:shade val="15000"/>
-            </a:schemeClr>
-          </a:lnRef>
-          <a:fillRef idx="1">
-            <a:schemeClr val="accent1"/>
-          </a:fillRef>
-          <a:effectRef idx="0">
-            <a:schemeClr val="accent1"/>
-          </a:effectRef>
-          <a:fontRef idx="minor">
-            <a:schemeClr val="lt1"/>
-          </a:fontRef>
-        </p:style>
-        <p:txBody>
-          <a:bodyPr rtlCol="0" anchor="ctr"/>
-          <a:lstStyle/>
-          <a:p>
-            <a:pPr algn="ctr"/>
-            <a:r>
-              <a:rPr lang="en-US" dirty="0"/>
-              <a:t>PC</a:t>
-            </a:r>
-          </a:p>
-        </p:txBody>
-      </p:sp>
-      <p:sp>
-        <p:nvSpPr>
-          <p:cNvPr id="34" name="TextBox 33">
-            <a:extLst>
-              <a:ext uri="{FF2B5EF4-FFF2-40B4-BE49-F238E27FC236}">
-                <a16:creationId xmlns:a16="http://schemas.microsoft.com/office/drawing/2014/main" id="{AAF8D060-B516-028F-A160-DDD58A9B4A1C}"/>
-              </a:ext>
-            </a:extLst>
-          </p:cNvPr>
-          <p:cNvSpPr txBox="1"/>
-          <p:nvPr/>
-        </p:nvSpPr>
-        <p:spPr>
-          <a:xfrm>
-            <a:off x="3169553" y="5107257"/>
-            <a:ext cx="729687" cy="400110"/>
-          </a:xfrm>
-          <a:prstGeom prst="rect">
-            <a:avLst/>
-          </a:prstGeom>
-          <a:noFill/>
-        </p:spPr>
-        <p:txBody>
-          <a:bodyPr wrap="none" rtlCol="0">
-            <a:spAutoFit/>
-          </a:bodyPr>
-          <a:lstStyle/>
-          <a:p>
-            <a:pPr algn="ctr"/>
-            <a:r>
-              <a:rPr lang="en-US" sz="1000" dirty="0"/>
-              <a:t>Hazard</a:t>
-            </a:r>
-          </a:p>
-          <a:p>
-            <a:pPr algn="ctr"/>
-            <a:r>
-              <a:rPr lang="en-US" sz="1000" dirty="0"/>
-              <a:t>Detection</a:t>
-            </a:r>
-          </a:p>
-        </p:txBody>
-      </p:sp>
-      <p:cxnSp>
-        <p:nvCxnSpPr>
-          <p:cNvPr id="35" name="Straight Arrow Connector 34">
-            <a:extLst>
-              <a:ext uri="{FF2B5EF4-FFF2-40B4-BE49-F238E27FC236}">
-                <a16:creationId xmlns:a16="http://schemas.microsoft.com/office/drawing/2014/main" id="{41C7F50D-F709-CA85-5675-DD0636890A76}"/>
-              </a:ext>
-            </a:extLst>
-          </p:cNvPr>
-          <p:cNvCxnSpPr>
-            <a:cxnSpLocks/>
-          </p:cNvCxnSpPr>
-          <p:nvPr/>
-        </p:nvCxnSpPr>
-        <p:spPr>
-          <a:xfrm>
-            <a:off x="2743887" y="5277871"/>
-            <a:ext cx="442253" cy="0"/>
-          </a:xfrm>
-          <a:prstGeom prst="straightConnector1">
-            <a:avLst/>
-          </a:prstGeom>
-          <a:ln>
             <a:tailEnd type="triangle"/>
           </a:ln>
         </p:spPr>
@@ -10565,10 +9772,10 @@
       </p:cxnSp>
       <p:cxnSp>
         <p:nvCxnSpPr>
-          <p:cNvPr id="61" name="Straight Arrow Connector 60">
-            <a:extLst>
-              <a:ext uri="{FF2B5EF4-FFF2-40B4-BE49-F238E27FC236}">
-                <a16:creationId xmlns:a16="http://schemas.microsoft.com/office/drawing/2014/main" id="{628AAA9C-DA03-CA34-B011-035AEF93D851}"/>
+          <p:cNvPr id="26" name="Straight Arrow Connector 25">
+            <a:extLst>
+              <a:ext uri="{FF2B5EF4-FFF2-40B4-BE49-F238E27FC236}">
+                <a16:creationId xmlns:a16="http://schemas.microsoft.com/office/drawing/2014/main" id="{EFC7A41C-61ED-49E4-BA0B-27EC82F62902}"/>
               </a:ext>
             </a:extLst>
           </p:cNvPr>
@@ -10578,9 +9785,9 @@
           <p:nvPr/>
         </p:nvCxnSpPr>
         <p:spPr>
-          <a:xfrm flipH="1">
-            <a:off x="3888841" y="5478179"/>
-            <a:ext cx="205614" cy="0"/>
+          <a:xfrm flipV="1">
+            <a:off x="10915967" y="3114188"/>
+            <a:ext cx="0" cy="195214"/>
           </a:xfrm>
           <a:prstGeom prst="straightConnector1">
             <a:avLst/>
@@ -10609,10 +9816,10 @@
       </p:cxnSp>
       <p:cxnSp>
         <p:nvCxnSpPr>
-          <p:cNvPr id="77" name="Straight Connector 76">
-            <a:extLst>
-              <a:ext uri="{FF2B5EF4-FFF2-40B4-BE49-F238E27FC236}">
-                <a16:creationId xmlns:a16="http://schemas.microsoft.com/office/drawing/2014/main" id="{318283A9-1322-8DD9-D5D3-E250A298DF07}"/>
+          <p:cNvPr id="28" name="Straight Arrow Connector 27">
+            <a:extLst>
+              <a:ext uri="{FF2B5EF4-FFF2-40B4-BE49-F238E27FC236}">
+                <a16:creationId xmlns:a16="http://schemas.microsoft.com/office/drawing/2014/main" id="{EE79F449-2B1D-87A9-9E7B-9DD8C11C7B9B}"/>
               </a:ext>
             </a:extLst>
           </p:cNvPr>
@@ -10622,13 +9829,887 @@
           <p:nvPr/>
         </p:nvCxnSpPr>
         <p:spPr>
-          <a:xfrm>
-            <a:off x="2763237" y="4519030"/>
-            <a:ext cx="0" cy="761538"/>
-          </a:xfrm>
-          <a:prstGeom prst="line">
-            <a:avLst/>
-          </a:prstGeom>
+          <a:xfrm flipV="1">
+            <a:off x="10776267" y="3233786"/>
+            <a:ext cx="0" cy="195214"/>
+          </a:xfrm>
+          <a:prstGeom prst="straightConnector1">
+            <a:avLst/>
+          </a:prstGeom>
+          <a:ln>
+            <a:solidFill>
+              <a:srgbClr val="FF0000"/>
+            </a:solidFill>
+            <a:tailEnd type="triangle"/>
+          </a:ln>
+        </p:spPr>
+        <p:style>
+          <a:lnRef idx="2">
+            <a:schemeClr val="accent1"/>
+          </a:lnRef>
+          <a:fillRef idx="0">
+            <a:schemeClr val="accent1"/>
+          </a:fillRef>
+          <a:effectRef idx="1">
+            <a:schemeClr val="accent1"/>
+          </a:effectRef>
+          <a:fontRef idx="minor">
+            <a:schemeClr val="tx1"/>
+          </a:fontRef>
+        </p:style>
+      </p:cxnSp>
+      <p:grpSp>
+        <p:nvGrpSpPr>
+          <p:cNvPr id="30" name="Group 29">
+            <a:extLst>
+              <a:ext uri="{FF2B5EF4-FFF2-40B4-BE49-F238E27FC236}">
+                <a16:creationId xmlns:a16="http://schemas.microsoft.com/office/drawing/2014/main" id="{F29CD4F1-4D65-2071-CB5D-56C21B0A8ADD}"/>
+              </a:ext>
+            </a:extLst>
+          </p:cNvPr>
+          <p:cNvGrpSpPr/>
+          <p:nvPr/>
+        </p:nvGrpSpPr>
+        <p:grpSpPr>
+          <a:xfrm rot="16200000">
+            <a:off x="8495764" y="2520050"/>
+            <a:ext cx="405246" cy="267608"/>
+            <a:chOff x="6169099" y="3766490"/>
+            <a:chExt cx="533480" cy="267608"/>
+          </a:xfrm>
+        </p:grpSpPr>
+        <p:pic>
+          <p:nvPicPr>
+            <p:cNvPr id="32" name="Picture 31">
+              <a:extLst>
+                <a:ext uri="{FF2B5EF4-FFF2-40B4-BE49-F238E27FC236}">
+                  <a16:creationId xmlns:a16="http://schemas.microsoft.com/office/drawing/2014/main" id="{08E484B5-905D-B38D-3D91-241CE1719D6C}"/>
+                </a:ext>
+              </a:extLst>
+            </p:cNvPr>
+            <p:cNvPicPr>
+              <a:picLocks noChangeAspect="1"/>
+            </p:cNvPicPr>
+            <p:nvPr/>
+          </p:nvPicPr>
+          <p:blipFill>
+            <a:blip r:embed="rId2"/>
+            <a:stretch>
+              <a:fillRect/>
+            </a:stretch>
+          </p:blipFill>
+          <p:spPr>
+            <a:xfrm>
+              <a:off x="6198580" y="3766490"/>
+              <a:ext cx="503999" cy="267608"/>
+            </a:xfrm>
+            <a:prstGeom prst="rect">
+              <a:avLst/>
+            </a:prstGeom>
+          </p:spPr>
+        </p:pic>
+        <p:cxnSp>
+          <p:nvCxnSpPr>
+            <p:cNvPr id="34" name="Straight Arrow Connector 33">
+              <a:extLst>
+                <a:ext uri="{FF2B5EF4-FFF2-40B4-BE49-F238E27FC236}">
+                  <a16:creationId xmlns:a16="http://schemas.microsoft.com/office/drawing/2014/main" id="{72BE6CC3-2C59-A24A-5E92-68A707F8638E}"/>
+                </a:ext>
+              </a:extLst>
+            </p:cNvPr>
+            <p:cNvCxnSpPr>
+              <a:cxnSpLocks/>
+            </p:cNvCxnSpPr>
+            <p:nvPr/>
+          </p:nvCxnSpPr>
+          <p:spPr>
+            <a:xfrm>
+              <a:off x="6169099" y="3838587"/>
+              <a:ext cx="177808" cy="0"/>
+            </a:xfrm>
+            <a:prstGeom prst="straightConnector1">
+              <a:avLst/>
+            </a:prstGeom>
+            <a:ln>
+              <a:solidFill>
+                <a:srgbClr val="FF0000"/>
+              </a:solidFill>
+              <a:tailEnd type="triangle"/>
+            </a:ln>
+          </p:spPr>
+          <p:style>
+            <a:lnRef idx="2">
+              <a:schemeClr val="accent1"/>
+            </a:lnRef>
+            <a:fillRef idx="0">
+              <a:schemeClr val="accent1"/>
+            </a:fillRef>
+            <a:effectRef idx="1">
+              <a:schemeClr val="accent1"/>
+            </a:effectRef>
+            <a:fontRef idx="minor">
+              <a:schemeClr val="tx1"/>
+            </a:fontRef>
+          </p:style>
+        </p:cxnSp>
+        <p:cxnSp>
+          <p:nvCxnSpPr>
+            <p:cNvPr id="35" name="Straight Arrow Connector 34">
+              <a:extLst>
+                <a:ext uri="{FF2B5EF4-FFF2-40B4-BE49-F238E27FC236}">
+                  <a16:creationId xmlns:a16="http://schemas.microsoft.com/office/drawing/2014/main" id="{8AB80F94-094C-4CE9-C275-29945A350AA8}"/>
+                </a:ext>
+              </a:extLst>
+            </p:cNvPr>
+            <p:cNvCxnSpPr>
+              <a:cxnSpLocks/>
+            </p:cNvCxnSpPr>
+            <p:nvPr/>
+          </p:nvCxnSpPr>
+          <p:spPr>
+            <a:xfrm>
+              <a:off x="6169099" y="3958185"/>
+              <a:ext cx="177808" cy="0"/>
+            </a:xfrm>
+            <a:prstGeom prst="straightConnector1">
+              <a:avLst/>
+            </a:prstGeom>
+            <a:ln>
+              <a:solidFill>
+                <a:srgbClr val="FF0000"/>
+              </a:solidFill>
+              <a:tailEnd type="triangle"/>
+            </a:ln>
+          </p:spPr>
+          <p:style>
+            <a:lnRef idx="2">
+              <a:schemeClr val="accent1"/>
+            </a:lnRef>
+            <a:fillRef idx="0">
+              <a:schemeClr val="accent1"/>
+            </a:fillRef>
+            <a:effectRef idx="1">
+              <a:schemeClr val="accent1"/>
+            </a:effectRef>
+            <a:fontRef idx="minor">
+              <a:schemeClr val="tx1"/>
+            </a:fontRef>
+          </p:style>
+        </p:cxnSp>
+      </p:grpSp>
+      <p:cxnSp>
+        <p:nvCxnSpPr>
+          <p:cNvPr id="37" name="Straight Arrow Connector 36">
+            <a:extLst>
+              <a:ext uri="{FF2B5EF4-FFF2-40B4-BE49-F238E27FC236}">
+                <a16:creationId xmlns:a16="http://schemas.microsoft.com/office/drawing/2014/main" id="{A09C37C1-E5D0-9FBA-A932-2F98BACEC0B2}"/>
+              </a:ext>
+            </a:extLst>
+          </p:cNvPr>
+          <p:cNvCxnSpPr/>
+          <p:nvPr/>
+        </p:nvCxnSpPr>
+        <p:spPr>
+          <a:xfrm>
+            <a:off x="2870131" y="3309402"/>
+            <a:ext cx="177808" cy="0"/>
+          </a:xfrm>
+          <a:prstGeom prst="straightConnector1">
+            <a:avLst/>
+          </a:prstGeom>
+          <a:ln>
+            <a:solidFill>
+              <a:srgbClr val="FF0000"/>
+            </a:solidFill>
+            <a:tailEnd type="triangle"/>
+          </a:ln>
+        </p:spPr>
+        <p:style>
+          <a:lnRef idx="2">
+            <a:schemeClr val="accent1"/>
+          </a:lnRef>
+          <a:fillRef idx="0">
+            <a:schemeClr val="accent1"/>
+          </a:fillRef>
+          <a:effectRef idx="1">
+            <a:schemeClr val="accent1"/>
+          </a:effectRef>
+          <a:fontRef idx="minor">
+            <a:schemeClr val="tx1"/>
+          </a:fontRef>
+        </p:style>
+      </p:cxnSp>
+      <p:cxnSp>
+        <p:nvCxnSpPr>
+          <p:cNvPr id="38" name="Straight Arrow Connector 37">
+            <a:extLst>
+              <a:ext uri="{FF2B5EF4-FFF2-40B4-BE49-F238E27FC236}">
+                <a16:creationId xmlns:a16="http://schemas.microsoft.com/office/drawing/2014/main" id="{4D9B3B66-045C-4BC7-2F4D-857D0D686CD3}"/>
+              </a:ext>
+            </a:extLst>
+          </p:cNvPr>
+          <p:cNvCxnSpPr/>
+          <p:nvPr/>
+        </p:nvCxnSpPr>
+        <p:spPr>
+          <a:xfrm>
+            <a:off x="2870131" y="3429000"/>
+            <a:ext cx="177808" cy="0"/>
+          </a:xfrm>
+          <a:prstGeom prst="straightConnector1">
+            <a:avLst/>
+          </a:prstGeom>
+          <a:ln>
+            <a:solidFill>
+              <a:srgbClr val="FF0000"/>
+            </a:solidFill>
+            <a:tailEnd type="triangle"/>
+          </a:ln>
+        </p:spPr>
+        <p:style>
+          <a:lnRef idx="2">
+            <a:schemeClr val="accent1"/>
+          </a:lnRef>
+          <a:fillRef idx="0">
+            <a:schemeClr val="accent1"/>
+          </a:fillRef>
+          <a:effectRef idx="1">
+            <a:schemeClr val="accent1"/>
+          </a:effectRef>
+          <a:fontRef idx="minor">
+            <a:schemeClr val="tx1"/>
+          </a:fontRef>
+        </p:style>
+      </p:cxnSp>
+      <p:cxnSp>
+        <p:nvCxnSpPr>
+          <p:cNvPr id="39" name="Straight Arrow Connector 38">
+            <a:extLst>
+              <a:ext uri="{FF2B5EF4-FFF2-40B4-BE49-F238E27FC236}">
+                <a16:creationId xmlns:a16="http://schemas.microsoft.com/office/drawing/2014/main" id="{119991E4-90E6-F0D1-11C3-602FF77B7F79}"/>
+              </a:ext>
+            </a:extLst>
+          </p:cNvPr>
+          <p:cNvCxnSpPr/>
+          <p:nvPr/>
+        </p:nvCxnSpPr>
+        <p:spPr>
+          <a:xfrm>
+            <a:off x="9424268" y="4047113"/>
+            <a:ext cx="0" cy="230832"/>
+          </a:xfrm>
+          <a:prstGeom prst="straightConnector1">
+            <a:avLst/>
+          </a:prstGeom>
+          <a:ln>
+            <a:solidFill>
+              <a:srgbClr val="FF0000"/>
+            </a:solidFill>
+            <a:tailEnd type="triangle"/>
+          </a:ln>
+        </p:spPr>
+        <p:style>
+          <a:lnRef idx="2">
+            <a:schemeClr val="accent1"/>
+          </a:lnRef>
+          <a:fillRef idx="0">
+            <a:schemeClr val="accent1"/>
+          </a:fillRef>
+          <a:effectRef idx="1">
+            <a:schemeClr val="accent1"/>
+          </a:effectRef>
+          <a:fontRef idx="minor">
+            <a:schemeClr val="tx1"/>
+          </a:fontRef>
+        </p:style>
+      </p:cxnSp>
+      <p:cxnSp>
+        <p:nvCxnSpPr>
+          <p:cNvPr id="47" name="Straight Arrow Connector 46">
+            <a:extLst>
+              <a:ext uri="{FF2B5EF4-FFF2-40B4-BE49-F238E27FC236}">
+                <a16:creationId xmlns:a16="http://schemas.microsoft.com/office/drawing/2014/main" id="{8A262BB7-393A-3D10-4768-BA19460EE16D}"/>
+              </a:ext>
+            </a:extLst>
+          </p:cNvPr>
+          <p:cNvCxnSpPr/>
+          <p:nvPr/>
+        </p:nvCxnSpPr>
+        <p:spPr>
+          <a:xfrm>
+            <a:off x="9462368" y="4084284"/>
+            <a:ext cx="0" cy="230832"/>
+          </a:xfrm>
+          <a:prstGeom prst="straightConnector1">
+            <a:avLst/>
+          </a:prstGeom>
+          <a:ln>
+            <a:solidFill>
+              <a:srgbClr val="FF0000"/>
+            </a:solidFill>
+            <a:tailEnd type="triangle"/>
+          </a:ln>
+        </p:spPr>
+        <p:style>
+          <a:lnRef idx="2">
+            <a:schemeClr val="accent1"/>
+          </a:lnRef>
+          <a:fillRef idx="0">
+            <a:schemeClr val="accent1"/>
+          </a:fillRef>
+          <a:effectRef idx="1">
+            <a:schemeClr val="accent1"/>
+          </a:effectRef>
+          <a:fontRef idx="minor">
+            <a:schemeClr val="tx1"/>
+          </a:fontRef>
+        </p:style>
+      </p:cxnSp>
+      <p:cxnSp>
+        <p:nvCxnSpPr>
+          <p:cNvPr id="52" name="Straight Arrow Connector 51">
+            <a:extLst>
+              <a:ext uri="{FF2B5EF4-FFF2-40B4-BE49-F238E27FC236}">
+                <a16:creationId xmlns:a16="http://schemas.microsoft.com/office/drawing/2014/main" id="{2AC5E79F-36BB-C55A-DF2D-C7C8E0255836}"/>
+              </a:ext>
+            </a:extLst>
+          </p:cNvPr>
+          <p:cNvCxnSpPr/>
+          <p:nvPr/>
+        </p:nvCxnSpPr>
+        <p:spPr>
+          <a:xfrm>
+            <a:off x="9514036" y="4115287"/>
+            <a:ext cx="0" cy="230832"/>
+          </a:xfrm>
+          <a:prstGeom prst="straightConnector1">
+            <a:avLst/>
+          </a:prstGeom>
+          <a:ln>
+            <a:solidFill>
+              <a:srgbClr val="FF0000"/>
+            </a:solidFill>
+            <a:tailEnd type="triangle"/>
+          </a:ln>
+        </p:spPr>
+        <p:style>
+          <a:lnRef idx="2">
+            <a:schemeClr val="accent1"/>
+          </a:lnRef>
+          <a:fillRef idx="0">
+            <a:schemeClr val="accent1"/>
+          </a:fillRef>
+          <a:effectRef idx="1">
+            <a:schemeClr val="accent1"/>
+          </a:effectRef>
+          <a:fontRef idx="minor">
+            <a:schemeClr val="tx1"/>
+          </a:fontRef>
+        </p:style>
+      </p:cxnSp>
+      <p:cxnSp>
+        <p:nvCxnSpPr>
+          <p:cNvPr id="53" name="Straight Arrow Connector 52">
+            <a:extLst>
+              <a:ext uri="{FF2B5EF4-FFF2-40B4-BE49-F238E27FC236}">
+                <a16:creationId xmlns:a16="http://schemas.microsoft.com/office/drawing/2014/main" id="{FE547B99-6FC8-A74C-FEEB-9E4CADACFA53}"/>
+              </a:ext>
+            </a:extLst>
+          </p:cNvPr>
+          <p:cNvCxnSpPr>
+            <a:cxnSpLocks/>
+          </p:cNvCxnSpPr>
+          <p:nvPr/>
+        </p:nvCxnSpPr>
+        <p:spPr>
+          <a:xfrm>
+            <a:off x="8930725" y="4560055"/>
+            <a:ext cx="374301" cy="0"/>
+          </a:xfrm>
+          <a:prstGeom prst="straightConnector1">
+            <a:avLst/>
+          </a:prstGeom>
+          <a:ln>
+            <a:tailEnd type="triangle"/>
+          </a:ln>
+        </p:spPr>
+        <p:style>
+          <a:lnRef idx="2">
+            <a:schemeClr val="accent1"/>
+          </a:lnRef>
+          <a:fillRef idx="0">
+            <a:schemeClr val="accent1"/>
+          </a:fillRef>
+          <a:effectRef idx="1">
+            <a:schemeClr val="accent1"/>
+          </a:effectRef>
+          <a:fontRef idx="minor">
+            <a:schemeClr val="tx1"/>
+          </a:fontRef>
+        </p:style>
+      </p:cxnSp>
+      <p:sp>
+        <p:nvSpPr>
+          <p:cNvPr id="54" name="TextBox 53">
+            <a:extLst>
+              <a:ext uri="{FF2B5EF4-FFF2-40B4-BE49-F238E27FC236}">
+                <a16:creationId xmlns:a16="http://schemas.microsoft.com/office/drawing/2014/main" id="{7C5CCBD1-0844-480F-8141-9A9CAA44FF50}"/>
+              </a:ext>
+            </a:extLst>
+          </p:cNvPr>
+          <p:cNvSpPr txBox="1"/>
+          <p:nvPr/>
+        </p:nvSpPr>
+        <p:spPr>
+          <a:xfrm>
+            <a:off x="7868407" y="4099798"/>
+            <a:ext cx="413896" cy="230832"/>
+          </a:xfrm>
+          <a:prstGeom prst="rect">
+            <a:avLst/>
+          </a:prstGeom>
+          <a:noFill/>
+        </p:spPr>
+        <p:txBody>
+          <a:bodyPr wrap="none" rtlCol="0">
+            <a:spAutoFit/>
+          </a:bodyPr>
+          <a:lstStyle/>
+          <a:p>
+            <a:pPr algn="ctr"/>
+            <a:r>
+              <a:rPr lang="en-US" sz="900" dirty="0"/>
+              <a:t>NPC</a:t>
+            </a:r>
+          </a:p>
+        </p:txBody>
+      </p:sp>
+      <p:sp>
+        <p:nvSpPr>
+          <p:cNvPr id="57" name="TextBox 56">
+            <a:extLst>
+              <a:ext uri="{FF2B5EF4-FFF2-40B4-BE49-F238E27FC236}">
+                <a16:creationId xmlns:a16="http://schemas.microsoft.com/office/drawing/2014/main" id="{BE8947B1-691B-936E-60AD-9FDFE4A4EA75}"/>
+              </a:ext>
+            </a:extLst>
+          </p:cNvPr>
+          <p:cNvSpPr txBox="1"/>
+          <p:nvPr/>
+        </p:nvSpPr>
+        <p:spPr>
+          <a:xfrm>
+            <a:off x="7871560" y="4515171"/>
+            <a:ext cx="407484" cy="230832"/>
+          </a:xfrm>
+          <a:prstGeom prst="rect">
+            <a:avLst/>
+          </a:prstGeom>
+          <a:noFill/>
+        </p:spPr>
+        <p:txBody>
+          <a:bodyPr wrap="none" rtlCol="0">
+            <a:spAutoFit/>
+          </a:bodyPr>
+          <a:lstStyle/>
+          <a:p>
+            <a:pPr algn="ctr"/>
+            <a:r>
+              <a:rPr lang="en-US" sz="900" dirty="0" err="1"/>
+              <a:t>imm</a:t>
+            </a:r>
+            <a:endParaRPr lang="en-US" sz="900" dirty="0"/>
+          </a:p>
+        </p:txBody>
+      </p:sp>
+      <p:cxnSp>
+        <p:nvCxnSpPr>
+          <p:cNvPr id="58" name="Straight Arrow Connector 57">
+            <a:extLst>
+              <a:ext uri="{FF2B5EF4-FFF2-40B4-BE49-F238E27FC236}">
+                <a16:creationId xmlns:a16="http://schemas.microsoft.com/office/drawing/2014/main" id="{37D73938-CD18-95EE-AF99-64BFF08C2E0D}"/>
+              </a:ext>
+            </a:extLst>
+          </p:cNvPr>
+          <p:cNvCxnSpPr>
+            <a:cxnSpLocks/>
+          </p:cNvCxnSpPr>
+          <p:nvPr/>
+        </p:nvCxnSpPr>
+        <p:spPr>
+          <a:xfrm flipV="1">
+            <a:off x="9214921" y="4718145"/>
+            <a:ext cx="100338" cy="2498"/>
+          </a:xfrm>
+          <a:prstGeom prst="straightConnector1">
+            <a:avLst/>
+          </a:prstGeom>
+          <a:ln>
+            <a:tailEnd type="triangle"/>
+          </a:ln>
+        </p:spPr>
+        <p:style>
+          <a:lnRef idx="2">
+            <a:schemeClr val="accent1"/>
+          </a:lnRef>
+          <a:fillRef idx="0">
+            <a:schemeClr val="accent1"/>
+          </a:fillRef>
+          <a:effectRef idx="1">
+            <a:schemeClr val="accent1"/>
+          </a:effectRef>
+          <a:fontRef idx="minor">
+            <a:schemeClr val="tx1"/>
+          </a:fontRef>
+        </p:style>
+      </p:cxnSp>
+      <p:sp>
+        <p:nvSpPr>
+          <p:cNvPr id="59" name="TextBox 58">
+            <a:extLst>
+              <a:ext uri="{FF2B5EF4-FFF2-40B4-BE49-F238E27FC236}">
+                <a16:creationId xmlns:a16="http://schemas.microsoft.com/office/drawing/2014/main" id="{62908768-78CB-6AA2-9F8F-560147BBA50C}"/>
+              </a:ext>
+            </a:extLst>
+          </p:cNvPr>
+          <p:cNvSpPr txBox="1"/>
+          <p:nvPr/>
+        </p:nvSpPr>
+        <p:spPr>
+          <a:xfrm>
+            <a:off x="8892828" y="4599810"/>
+            <a:ext cx="413896" cy="230832"/>
+          </a:xfrm>
+          <a:prstGeom prst="rect">
+            <a:avLst/>
+          </a:prstGeom>
+          <a:noFill/>
+        </p:spPr>
+        <p:txBody>
+          <a:bodyPr wrap="none" rtlCol="0">
+            <a:spAutoFit/>
+          </a:bodyPr>
+          <a:lstStyle/>
+          <a:p>
+            <a:pPr algn="ctr"/>
+            <a:r>
+              <a:rPr lang="en-US" sz="900" dirty="0"/>
+              <a:t>NPC</a:t>
+            </a:r>
+          </a:p>
+        </p:txBody>
+      </p:sp>
+      <p:grpSp>
+        <p:nvGrpSpPr>
+          <p:cNvPr id="61" name="Group 60">
+            <a:extLst>
+              <a:ext uri="{FF2B5EF4-FFF2-40B4-BE49-F238E27FC236}">
+                <a16:creationId xmlns:a16="http://schemas.microsoft.com/office/drawing/2014/main" id="{16FC76F5-1B0B-DFD2-2DFE-467D7246D31F}"/>
+              </a:ext>
+            </a:extLst>
+          </p:cNvPr>
+          <p:cNvGrpSpPr/>
+          <p:nvPr/>
+        </p:nvGrpSpPr>
+        <p:grpSpPr>
+          <a:xfrm>
+            <a:off x="8407592" y="4109253"/>
+            <a:ext cx="292770" cy="637674"/>
+            <a:chOff x="1074820" y="1507958"/>
+            <a:chExt cx="292770" cy="637674"/>
+          </a:xfrm>
+        </p:grpSpPr>
+        <p:cxnSp>
+          <p:nvCxnSpPr>
+            <p:cNvPr id="66" name="Straight Connector 65">
+              <a:extLst>
+                <a:ext uri="{FF2B5EF4-FFF2-40B4-BE49-F238E27FC236}">
+                  <a16:creationId xmlns:a16="http://schemas.microsoft.com/office/drawing/2014/main" id="{C0F3C053-4536-CA7C-4EE4-418998840D9A}"/>
+                </a:ext>
+              </a:extLst>
+            </p:cNvPr>
+            <p:cNvCxnSpPr>
+              <a:cxnSpLocks/>
+            </p:cNvCxnSpPr>
+            <p:nvPr/>
+          </p:nvCxnSpPr>
+          <p:spPr>
+            <a:xfrm>
+              <a:off x="1074821" y="1507958"/>
+              <a:ext cx="0" cy="212558"/>
+            </a:xfrm>
+            <a:prstGeom prst="line">
+              <a:avLst/>
+            </a:prstGeom>
+          </p:spPr>
+          <p:style>
+            <a:lnRef idx="2">
+              <a:schemeClr val="accent1"/>
+            </a:lnRef>
+            <a:fillRef idx="0">
+              <a:schemeClr val="accent1"/>
+            </a:fillRef>
+            <a:effectRef idx="1">
+              <a:schemeClr val="accent1"/>
+            </a:effectRef>
+            <a:fontRef idx="minor">
+              <a:schemeClr val="tx1"/>
+            </a:fontRef>
+          </p:style>
+        </p:cxnSp>
+        <p:cxnSp>
+          <p:nvCxnSpPr>
+            <p:cNvPr id="67" name="Straight Connector 66">
+              <a:extLst>
+                <a:ext uri="{FF2B5EF4-FFF2-40B4-BE49-F238E27FC236}">
+                  <a16:creationId xmlns:a16="http://schemas.microsoft.com/office/drawing/2014/main" id="{F4ACF4A3-01ED-D5D2-AE79-3A96A5B0A6EC}"/>
+                </a:ext>
+              </a:extLst>
+            </p:cNvPr>
+            <p:cNvCxnSpPr>
+              <a:cxnSpLocks/>
+            </p:cNvCxnSpPr>
+            <p:nvPr/>
+          </p:nvCxnSpPr>
+          <p:spPr>
+            <a:xfrm>
+              <a:off x="1367590" y="1720516"/>
+              <a:ext cx="0" cy="212558"/>
+            </a:xfrm>
+            <a:prstGeom prst="line">
+              <a:avLst/>
+            </a:prstGeom>
+          </p:spPr>
+          <p:style>
+            <a:lnRef idx="2">
+              <a:schemeClr val="accent1"/>
+            </a:lnRef>
+            <a:fillRef idx="0">
+              <a:schemeClr val="accent1"/>
+            </a:fillRef>
+            <a:effectRef idx="1">
+              <a:schemeClr val="accent1"/>
+            </a:effectRef>
+            <a:fontRef idx="minor">
+              <a:schemeClr val="tx1"/>
+            </a:fontRef>
+          </p:style>
+        </p:cxnSp>
+        <p:cxnSp>
+          <p:nvCxnSpPr>
+            <p:cNvPr id="68" name="Straight Connector 67">
+              <a:extLst>
+                <a:ext uri="{FF2B5EF4-FFF2-40B4-BE49-F238E27FC236}">
+                  <a16:creationId xmlns:a16="http://schemas.microsoft.com/office/drawing/2014/main" id="{F8BA57EF-BE1E-D9E4-5BCF-2A7FF9099FFC}"/>
+                </a:ext>
+              </a:extLst>
+            </p:cNvPr>
+            <p:cNvCxnSpPr>
+              <a:cxnSpLocks/>
+            </p:cNvCxnSpPr>
+            <p:nvPr/>
+          </p:nvCxnSpPr>
+          <p:spPr>
+            <a:xfrm>
+              <a:off x="1074821" y="1933074"/>
+              <a:ext cx="0" cy="212558"/>
+            </a:xfrm>
+            <a:prstGeom prst="line">
+              <a:avLst/>
+            </a:prstGeom>
+          </p:spPr>
+          <p:style>
+            <a:lnRef idx="2">
+              <a:schemeClr val="accent1"/>
+            </a:lnRef>
+            <a:fillRef idx="0">
+              <a:schemeClr val="accent1"/>
+            </a:fillRef>
+            <a:effectRef idx="1">
+              <a:schemeClr val="accent1"/>
+            </a:effectRef>
+            <a:fontRef idx="minor">
+              <a:schemeClr val="tx1"/>
+            </a:fontRef>
+          </p:style>
+        </p:cxnSp>
+        <p:cxnSp>
+          <p:nvCxnSpPr>
+            <p:cNvPr id="72" name="Straight Connector 71">
+              <a:extLst>
+                <a:ext uri="{FF2B5EF4-FFF2-40B4-BE49-F238E27FC236}">
+                  <a16:creationId xmlns:a16="http://schemas.microsoft.com/office/drawing/2014/main" id="{35E72814-B29A-A6B9-3873-6A3C7C551AE8}"/>
+                </a:ext>
+              </a:extLst>
+            </p:cNvPr>
+            <p:cNvCxnSpPr>
+              <a:cxnSpLocks/>
+            </p:cNvCxnSpPr>
+            <p:nvPr/>
+          </p:nvCxnSpPr>
+          <p:spPr>
+            <a:xfrm flipH="1">
+              <a:off x="1074821" y="1936227"/>
+              <a:ext cx="292769" cy="209405"/>
+            </a:xfrm>
+            <a:prstGeom prst="line">
+              <a:avLst/>
+            </a:prstGeom>
+          </p:spPr>
+          <p:style>
+            <a:lnRef idx="2">
+              <a:schemeClr val="accent1"/>
+            </a:lnRef>
+            <a:fillRef idx="0">
+              <a:schemeClr val="accent1"/>
+            </a:fillRef>
+            <a:effectRef idx="1">
+              <a:schemeClr val="accent1"/>
+            </a:effectRef>
+            <a:fontRef idx="minor">
+              <a:schemeClr val="tx1"/>
+            </a:fontRef>
+          </p:style>
+        </p:cxnSp>
+        <p:cxnSp>
+          <p:nvCxnSpPr>
+            <p:cNvPr id="75" name="Straight Connector 74">
+              <a:extLst>
+                <a:ext uri="{FF2B5EF4-FFF2-40B4-BE49-F238E27FC236}">
+                  <a16:creationId xmlns:a16="http://schemas.microsoft.com/office/drawing/2014/main" id="{8E1DD0ED-9DFA-FDD8-737C-FB8DE70DA26A}"/>
+                </a:ext>
+              </a:extLst>
+            </p:cNvPr>
+            <p:cNvCxnSpPr>
+              <a:cxnSpLocks/>
+            </p:cNvCxnSpPr>
+            <p:nvPr/>
+          </p:nvCxnSpPr>
+          <p:spPr>
+            <a:xfrm flipH="1" flipV="1">
+              <a:off x="1074821" y="1507958"/>
+              <a:ext cx="292769" cy="215711"/>
+            </a:xfrm>
+            <a:prstGeom prst="line">
+              <a:avLst/>
+            </a:prstGeom>
+          </p:spPr>
+          <p:style>
+            <a:lnRef idx="2">
+              <a:schemeClr val="accent1"/>
+            </a:lnRef>
+            <a:fillRef idx="0">
+              <a:schemeClr val="accent1"/>
+            </a:fillRef>
+            <a:effectRef idx="1">
+              <a:schemeClr val="accent1"/>
+            </a:effectRef>
+            <a:fontRef idx="minor">
+              <a:schemeClr val="tx1"/>
+            </a:fontRef>
+          </p:style>
+        </p:cxnSp>
+        <p:cxnSp>
+          <p:nvCxnSpPr>
+            <p:cNvPr id="76" name="Straight Connector 75">
+              <a:extLst>
+                <a:ext uri="{FF2B5EF4-FFF2-40B4-BE49-F238E27FC236}">
+                  <a16:creationId xmlns:a16="http://schemas.microsoft.com/office/drawing/2014/main" id="{10A822E0-4EAA-5FC7-F211-354CF1DD8C97}"/>
+                </a:ext>
+              </a:extLst>
+            </p:cNvPr>
+            <p:cNvCxnSpPr>
+              <a:cxnSpLocks/>
+            </p:cNvCxnSpPr>
+            <p:nvPr/>
+          </p:nvCxnSpPr>
+          <p:spPr>
+            <a:xfrm flipV="1">
+              <a:off x="1074821" y="1829948"/>
+              <a:ext cx="140545" cy="103126"/>
+            </a:xfrm>
+            <a:prstGeom prst="line">
+              <a:avLst/>
+            </a:prstGeom>
+          </p:spPr>
+          <p:style>
+            <a:lnRef idx="2">
+              <a:schemeClr val="accent1"/>
+            </a:lnRef>
+            <a:fillRef idx="0">
+              <a:schemeClr val="accent1"/>
+            </a:fillRef>
+            <a:effectRef idx="1">
+              <a:schemeClr val="accent1"/>
+            </a:effectRef>
+            <a:fontRef idx="minor">
+              <a:schemeClr val="tx1"/>
+            </a:fontRef>
+          </p:style>
+        </p:cxnSp>
+        <p:cxnSp>
+          <p:nvCxnSpPr>
+            <p:cNvPr id="77" name="Straight Connector 76">
+              <a:extLst>
+                <a:ext uri="{FF2B5EF4-FFF2-40B4-BE49-F238E27FC236}">
+                  <a16:creationId xmlns:a16="http://schemas.microsoft.com/office/drawing/2014/main" id="{05428BE6-A028-2505-F585-6481D0268AE8}"/>
+                </a:ext>
+              </a:extLst>
+            </p:cNvPr>
+            <p:cNvCxnSpPr>
+              <a:cxnSpLocks/>
+            </p:cNvCxnSpPr>
+            <p:nvPr/>
+          </p:nvCxnSpPr>
+          <p:spPr>
+            <a:xfrm>
+              <a:off x="1074820" y="1716505"/>
+              <a:ext cx="140545" cy="107137"/>
+            </a:xfrm>
+            <a:prstGeom prst="line">
+              <a:avLst/>
+            </a:prstGeom>
+          </p:spPr>
+          <p:style>
+            <a:lnRef idx="2">
+              <a:schemeClr val="accent1"/>
+            </a:lnRef>
+            <a:fillRef idx="0">
+              <a:schemeClr val="accent1"/>
+            </a:fillRef>
+            <a:effectRef idx="1">
+              <a:schemeClr val="accent1"/>
+            </a:effectRef>
+            <a:fontRef idx="minor">
+              <a:schemeClr val="tx1"/>
+            </a:fontRef>
+          </p:style>
+        </p:cxnSp>
+      </p:grpSp>
+      <p:cxnSp>
+        <p:nvCxnSpPr>
+          <p:cNvPr id="78" name="Straight Arrow Connector 77">
+            <a:extLst>
+              <a:ext uri="{FF2B5EF4-FFF2-40B4-BE49-F238E27FC236}">
+                <a16:creationId xmlns:a16="http://schemas.microsoft.com/office/drawing/2014/main" id="{179B177D-A620-CBB7-1F57-B85744BC1768}"/>
+              </a:ext>
+            </a:extLst>
+          </p:cNvPr>
+          <p:cNvCxnSpPr>
+            <a:cxnSpLocks/>
+          </p:cNvCxnSpPr>
+          <p:nvPr/>
+        </p:nvCxnSpPr>
+        <p:spPr>
+          <a:xfrm>
+            <a:off x="8233657" y="4640648"/>
+            <a:ext cx="173935" cy="0"/>
+          </a:xfrm>
+          <a:prstGeom prst="straightConnector1">
+            <a:avLst/>
+          </a:prstGeom>
+          <a:ln>
+            <a:tailEnd type="triangle"/>
+          </a:ln>
         </p:spPr>
         <p:style>
           <a:lnRef idx="2">
@@ -10650,7 +10731,82 @@
           <p:cNvPr id="79" name="Straight Arrow Connector 78">
             <a:extLst>
               <a:ext uri="{FF2B5EF4-FFF2-40B4-BE49-F238E27FC236}">
-                <a16:creationId xmlns:a16="http://schemas.microsoft.com/office/drawing/2014/main" id="{A9A8F4E2-BF11-CC7D-3DDC-10009DD0232B}"/>
+                <a16:creationId xmlns:a16="http://schemas.microsoft.com/office/drawing/2014/main" id="{64751035-C943-F4AC-E721-2329E2124269}"/>
+              </a:ext>
+            </a:extLst>
+          </p:cNvPr>
+          <p:cNvCxnSpPr/>
+          <p:nvPr/>
+        </p:nvCxnSpPr>
+        <p:spPr>
+          <a:xfrm>
+            <a:off x="8229784" y="4215532"/>
+            <a:ext cx="177808" cy="0"/>
+          </a:xfrm>
+          <a:prstGeom prst="straightConnector1">
+            <a:avLst/>
+          </a:prstGeom>
+          <a:ln>
+            <a:tailEnd type="triangle"/>
+          </a:ln>
+        </p:spPr>
+        <p:style>
+          <a:lnRef idx="2">
+            <a:schemeClr val="accent1"/>
+          </a:lnRef>
+          <a:fillRef idx="0">
+            <a:schemeClr val="accent1"/>
+          </a:fillRef>
+          <a:effectRef idx="1">
+            <a:schemeClr val="accent1"/>
+          </a:effectRef>
+          <a:fontRef idx="minor">
+            <a:schemeClr val="tx1"/>
+          </a:fontRef>
+        </p:style>
+      </p:cxnSp>
+      <p:sp>
+        <p:nvSpPr>
+          <p:cNvPr id="80" name="TextBox 79">
+            <a:extLst>
+              <a:ext uri="{FF2B5EF4-FFF2-40B4-BE49-F238E27FC236}">
+                <a16:creationId xmlns:a16="http://schemas.microsoft.com/office/drawing/2014/main" id="{55A3E227-0BF3-A73B-3BC7-43B3ED0C951A}"/>
+              </a:ext>
+            </a:extLst>
+          </p:cNvPr>
+          <p:cNvSpPr txBox="1"/>
+          <p:nvPr/>
+        </p:nvSpPr>
+        <p:spPr>
+          <a:xfrm>
+            <a:off x="8442429" y="4314065"/>
+            <a:ext cx="351378" cy="230832"/>
+          </a:xfrm>
+          <a:prstGeom prst="rect">
+            <a:avLst/>
+          </a:prstGeom>
+          <a:noFill/>
+        </p:spPr>
+        <p:txBody>
+          <a:bodyPr wrap="none" rtlCol="0">
+            <a:spAutoFit/>
+          </a:bodyPr>
+          <a:lstStyle/>
+          <a:p>
+            <a:pPr algn="ctr"/>
+            <a:r>
+              <a:rPr lang="en-US" sz="900" dirty="0"/>
+              <a:t>“+”</a:t>
+            </a:r>
+          </a:p>
+        </p:txBody>
+      </p:sp>
+      <p:cxnSp>
+        <p:nvCxnSpPr>
+          <p:cNvPr id="82" name="Straight Arrow Connector 81">
+            <a:extLst>
+              <a:ext uri="{FF2B5EF4-FFF2-40B4-BE49-F238E27FC236}">
+                <a16:creationId xmlns:a16="http://schemas.microsoft.com/office/drawing/2014/main" id="{2BADD6A5-EF1D-D5D2-C1C0-C06AAF0FB60A}"/>
               </a:ext>
             </a:extLst>
           </p:cNvPr>
@@ -10660,9 +10816,86 @@
           <p:nvPr/>
         </p:nvCxnSpPr>
         <p:spPr>
-          <a:xfrm>
-            <a:off x="2981569" y="5160759"/>
-            <a:ext cx="211703" cy="0"/>
+          <a:xfrm flipV="1">
+            <a:off x="9192573" y="4893615"/>
+            <a:ext cx="100338" cy="2498"/>
+          </a:xfrm>
+          <a:prstGeom prst="straightConnector1">
+            <a:avLst/>
+          </a:prstGeom>
+          <a:ln>
+            <a:tailEnd type="triangle"/>
+          </a:ln>
+        </p:spPr>
+        <p:style>
+          <a:lnRef idx="2">
+            <a:schemeClr val="accent1"/>
+          </a:lnRef>
+          <a:fillRef idx="0">
+            <a:schemeClr val="accent1"/>
+          </a:fillRef>
+          <a:effectRef idx="1">
+            <a:schemeClr val="accent1"/>
+          </a:effectRef>
+          <a:fontRef idx="minor">
+            <a:schemeClr val="tx1"/>
+          </a:fontRef>
+        </p:style>
+      </p:cxnSp>
+      <p:sp>
+        <p:nvSpPr>
+          <p:cNvPr id="84" name="TextBox 83">
+            <a:extLst>
+              <a:ext uri="{FF2B5EF4-FFF2-40B4-BE49-F238E27FC236}">
+                <a16:creationId xmlns:a16="http://schemas.microsoft.com/office/drawing/2014/main" id="{D1142331-E346-04E4-CE7D-40DA0254B7E8}"/>
+              </a:ext>
+            </a:extLst>
+          </p:cNvPr>
+          <p:cNvSpPr txBox="1"/>
+          <p:nvPr/>
+        </p:nvSpPr>
+        <p:spPr>
+          <a:xfrm>
+            <a:off x="8937784" y="4780084"/>
+            <a:ext cx="332142" cy="230832"/>
+          </a:xfrm>
+          <a:prstGeom prst="rect">
+            <a:avLst/>
+          </a:prstGeom>
+          <a:noFill/>
+        </p:spPr>
+        <p:txBody>
+          <a:bodyPr wrap="none" rtlCol="0">
+            <a:spAutoFit/>
+          </a:bodyPr>
+          <a:lstStyle/>
+          <a:p>
+            <a:pPr algn="ctr"/>
+            <a:r>
+              <a:rPr lang="en-US" sz="900" dirty="0"/>
+              <a:t>PC</a:t>
+            </a:r>
+          </a:p>
+        </p:txBody>
+      </p:sp>
+      <p:cxnSp>
+        <p:nvCxnSpPr>
+          <p:cNvPr id="86" name="Straight Arrow Connector 85">
+            <a:extLst>
+              <a:ext uri="{FF2B5EF4-FFF2-40B4-BE49-F238E27FC236}">
+                <a16:creationId xmlns:a16="http://schemas.microsoft.com/office/drawing/2014/main" id="{241FC06E-49A1-E737-FC39-BA3F124F2533}"/>
+              </a:ext>
+            </a:extLst>
+          </p:cNvPr>
+          <p:cNvCxnSpPr>
+            <a:cxnSpLocks/>
+          </p:cNvCxnSpPr>
+          <p:nvPr/>
+        </p:nvCxnSpPr>
+        <p:spPr>
+          <a:xfrm>
+            <a:off x="8930725" y="4346119"/>
+            <a:ext cx="374301" cy="0"/>
           </a:xfrm>
           <a:prstGeom prst="straightConnector1">
             <a:avLst/>
@@ -10688,24 +10921,29 @@
       </p:cxnSp>
       <p:cxnSp>
         <p:nvCxnSpPr>
-          <p:cNvPr id="84" name="Straight Connector 83">
-            <a:extLst>
-              <a:ext uri="{FF2B5EF4-FFF2-40B4-BE49-F238E27FC236}">
-                <a16:creationId xmlns:a16="http://schemas.microsoft.com/office/drawing/2014/main" id="{1A52A5D1-1BB7-3403-A1A5-86E132AA172B}"/>
-              </a:ext>
-            </a:extLst>
-          </p:cNvPr>
-          <p:cNvCxnSpPr/>
+          <p:cNvPr id="88" name="Straight Arrow Connector 87">
+            <a:extLst>
+              <a:ext uri="{FF2B5EF4-FFF2-40B4-BE49-F238E27FC236}">
+                <a16:creationId xmlns:a16="http://schemas.microsoft.com/office/drawing/2014/main" id="{1BC490C6-9F7A-C0A3-5E86-3D4C3F2DB87B}"/>
+              </a:ext>
+            </a:extLst>
+          </p:cNvPr>
+          <p:cNvCxnSpPr>
+            <a:cxnSpLocks/>
+          </p:cNvCxnSpPr>
           <p:nvPr/>
         </p:nvCxnSpPr>
         <p:spPr>
-          <a:xfrm flipH="1" flipV="1">
-            <a:off x="2602523" y="4499564"/>
-            <a:ext cx="164123" cy="7703"/>
-          </a:xfrm>
-          <a:prstGeom prst="line">
-            <a:avLst/>
-          </a:prstGeom>
+          <a:xfrm>
+            <a:off x="8930725" y="4346119"/>
+            <a:ext cx="0" cy="213936"/>
+          </a:xfrm>
+          <a:prstGeom prst="straightConnector1">
+            <a:avLst/>
+          </a:prstGeom>
+          <a:ln>
+            <a:tailEnd type="none"/>
+          </a:ln>
         </p:spPr>
         <p:style>
           <a:lnRef idx="2">
@@ -10724,24 +10962,304 @@
       </p:cxnSp>
       <p:cxnSp>
         <p:nvCxnSpPr>
-          <p:cNvPr id="88" name="Straight Connector 87">
-            <a:extLst>
-              <a:ext uri="{FF2B5EF4-FFF2-40B4-BE49-F238E27FC236}">
-                <a16:creationId xmlns:a16="http://schemas.microsoft.com/office/drawing/2014/main" id="{5F7582C7-10E1-623E-4E17-302DFD08C2CB}"/>
-              </a:ext>
-            </a:extLst>
-          </p:cNvPr>
-          <p:cNvCxnSpPr/>
+          <p:cNvPr id="92" name="Straight Arrow Connector 91">
+            <a:extLst>
+              <a:ext uri="{FF2B5EF4-FFF2-40B4-BE49-F238E27FC236}">
+                <a16:creationId xmlns:a16="http://schemas.microsoft.com/office/drawing/2014/main" id="{A258B8B8-0DCC-7046-F080-D64CBE4BD6A0}"/>
+              </a:ext>
+            </a:extLst>
+          </p:cNvPr>
+          <p:cNvCxnSpPr>
+            <a:cxnSpLocks/>
+          </p:cNvCxnSpPr>
           <p:nvPr/>
         </p:nvCxnSpPr>
         <p:spPr>
           <a:xfrm>
-            <a:off x="2989385" y="4912022"/>
-            <a:ext cx="0" cy="253947"/>
-          </a:xfrm>
-          <a:prstGeom prst="line">
-            <a:avLst/>
-          </a:prstGeom>
+            <a:off x="8698040" y="4454260"/>
+            <a:ext cx="232685" cy="0"/>
+          </a:xfrm>
+          <a:prstGeom prst="straightConnector1">
+            <a:avLst/>
+          </a:prstGeom>
+          <a:ln>
+            <a:tailEnd type="none"/>
+          </a:ln>
+        </p:spPr>
+        <p:style>
+          <a:lnRef idx="2">
+            <a:schemeClr val="accent1"/>
+          </a:lnRef>
+          <a:fillRef idx="0">
+            <a:schemeClr val="accent1"/>
+          </a:fillRef>
+          <a:effectRef idx="1">
+            <a:schemeClr val="accent1"/>
+          </a:effectRef>
+          <a:fontRef idx="minor">
+            <a:schemeClr val="tx1"/>
+          </a:fontRef>
+        </p:style>
+      </p:cxnSp>
+      <p:sp>
+        <p:nvSpPr>
+          <p:cNvPr id="106" name="Rectangle 105">
+            <a:extLst>
+              <a:ext uri="{FF2B5EF4-FFF2-40B4-BE49-F238E27FC236}">
+                <a16:creationId xmlns:a16="http://schemas.microsoft.com/office/drawing/2014/main" id="{802EBAD3-1207-E175-F4E6-F1CAAFD5CB84}"/>
+              </a:ext>
+            </a:extLst>
+          </p:cNvPr>
+          <p:cNvSpPr/>
+          <p:nvPr/>
+        </p:nvSpPr>
+        <p:spPr>
+          <a:xfrm>
+            <a:off x="4112869" y="5087156"/>
+            <a:ext cx="663423" cy="460640"/>
+          </a:xfrm>
+          <a:prstGeom prst="rect">
+            <a:avLst/>
+          </a:prstGeom>
+          <a:solidFill>
+            <a:schemeClr val="bg1"/>
+          </a:solidFill>
+        </p:spPr>
+        <p:style>
+          <a:lnRef idx="2">
+            <a:schemeClr val="accent1">
+              <a:shade val="15000"/>
+            </a:schemeClr>
+          </a:lnRef>
+          <a:fillRef idx="1">
+            <a:schemeClr val="accent1"/>
+          </a:fillRef>
+          <a:effectRef idx="0">
+            <a:schemeClr val="accent1"/>
+          </a:effectRef>
+          <a:fontRef idx="minor">
+            <a:schemeClr val="lt1"/>
+          </a:fontRef>
+        </p:style>
+        <p:txBody>
+          <a:bodyPr rtlCol="0" anchor="ctr"/>
+          <a:lstStyle/>
+          <a:p>
+            <a:pPr algn="ctr"/>
+            <a:r>
+              <a:rPr lang="en-US" dirty="0"/>
+              <a:t>PC</a:t>
+            </a:r>
+          </a:p>
+        </p:txBody>
+      </p:sp>
+      <p:sp>
+        <p:nvSpPr>
+          <p:cNvPr id="107" name="TextBox 106">
+            <a:extLst>
+              <a:ext uri="{FF2B5EF4-FFF2-40B4-BE49-F238E27FC236}">
+                <a16:creationId xmlns:a16="http://schemas.microsoft.com/office/drawing/2014/main" id="{B1546BBC-B812-DED8-4B26-9FABE47BC3AA}"/>
+              </a:ext>
+            </a:extLst>
+          </p:cNvPr>
+          <p:cNvSpPr txBox="1"/>
+          <p:nvPr/>
+        </p:nvSpPr>
+        <p:spPr>
+          <a:xfrm>
+            <a:off x="4171777" y="5125610"/>
+            <a:ext cx="574196" cy="384721"/>
+          </a:xfrm>
+          <a:prstGeom prst="rect">
+            <a:avLst/>
+          </a:prstGeom>
+          <a:noFill/>
+        </p:spPr>
+        <p:txBody>
+          <a:bodyPr wrap="none" rtlCol="0">
+            <a:spAutoFit/>
+          </a:bodyPr>
+          <a:lstStyle/>
+          <a:p>
+            <a:pPr algn="ctr"/>
+            <a:r>
+              <a:rPr lang="en-US" sz="1000" dirty="0"/>
+              <a:t>Stall</a:t>
+            </a:r>
+          </a:p>
+          <a:p>
+            <a:pPr algn="ctr"/>
+            <a:r>
+              <a:rPr lang="en-US" sz="900" dirty="0"/>
+              <a:t>counter</a:t>
+            </a:r>
+          </a:p>
+        </p:txBody>
+      </p:sp>
+      <p:cxnSp>
+        <p:nvCxnSpPr>
+          <p:cNvPr id="108" name="Straight Arrow Connector 107">
+            <a:extLst>
+              <a:ext uri="{FF2B5EF4-FFF2-40B4-BE49-F238E27FC236}">
+                <a16:creationId xmlns:a16="http://schemas.microsoft.com/office/drawing/2014/main" id="{55D04E53-F0F2-CC32-832F-AD990A0BD8D2}"/>
+              </a:ext>
+            </a:extLst>
+          </p:cNvPr>
+          <p:cNvCxnSpPr>
+            <a:cxnSpLocks/>
+          </p:cNvCxnSpPr>
+          <p:nvPr/>
+        </p:nvCxnSpPr>
+        <p:spPr>
+          <a:xfrm>
+            <a:off x="3882996" y="5224369"/>
+            <a:ext cx="229874" cy="0"/>
+          </a:xfrm>
+          <a:prstGeom prst="straightConnector1">
+            <a:avLst/>
+          </a:prstGeom>
+          <a:ln>
+            <a:solidFill>
+              <a:srgbClr val="FF0000"/>
+            </a:solidFill>
+            <a:tailEnd type="triangle"/>
+          </a:ln>
+        </p:spPr>
+        <p:style>
+          <a:lnRef idx="2">
+            <a:schemeClr val="accent1"/>
+          </a:lnRef>
+          <a:fillRef idx="0">
+            <a:schemeClr val="accent1"/>
+          </a:fillRef>
+          <a:effectRef idx="1">
+            <a:schemeClr val="accent1"/>
+          </a:effectRef>
+          <a:fontRef idx="minor">
+            <a:schemeClr val="tx1"/>
+          </a:fontRef>
+        </p:style>
+      </p:cxnSp>
+      <p:sp>
+        <p:nvSpPr>
+          <p:cNvPr id="109" name="Rectangle 108">
+            <a:extLst>
+              <a:ext uri="{FF2B5EF4-FFF2-40B4-BE49-F238E27FC236}">
+                <a16:creationId xmlns:a16="http://schemas.microsoft.com/office/drawing/2014/main" id="{A81CABDD-6671-8136-C507-5421CBF47C22}"/>
+              </a:ext>
+            </a:extLst>
+          </p:cNvPr>
+          <p:cNvSpPr/>
+          <p:nvPr/>
+        </p:nvSpPr>
+        <p:spPr>
+          <a:xfrm>
+            <a:off x="3204207" y="5087370"/>
+            <a:ext cx="678789" cy="484706"/>
+          </a:xfrm>
+          <a:prstGeom prst="rect">
+            <a:avLst/>
+          </a:prstGeom>
+          <a:solidFill>
+            <a:schemeClr val="bg1"/>
+          </a:solidFill>
+        </p:spPr>
+        <p:style>
+          <a:lnRef idx="2">
+            <a:schemeClr val="accent1">
+              <a:shade val="15000"/>
+            </a:schemeClr>
+          </a:lnRef>
+          <a:fillRef idx="1">
+            <a:schemeClr val="accent1"/>
+          </a:fillRef>
+          <a:effectRef idx="0">
+            <a:schemeClr val="accent1"/>
+          </a:effectRef>
+          <a:fontRef idx="minor">
+            <a:schemeClr val="lt1"/>
+          </a:fontRef>
+        </p:style>
+        <p:txBody>
+          <a:bodyPr rtlCol="0" anchor="ctr"/>
+          <a:lstStyle/>
+          <a:p>
+            <a:pPr algn="ctr"/>
+            <a:r>
+              <a:rPr lang="en-US" dirty="0"/>
+              <a:t>PC</a:t>
+            </a:r>
+          </a:p>
+        </p:txBody>
+      </p:sp>
+      <p:sp>
+        <p:nvSpPr>
+          <p:cNvPr id="110" name="TextBox 109">
+            <a:extLst>
+              <a:ext uri="{FF2B5EF4-FFF2-40B4-BE49-F238E27FC236}">
+                <a16:creationId xmlns:a16="http://schemas.microsoft.com/office/drawing/2014/main" id="{F182B11B-81F0-C7FD-76B3-7C27A04FAE43}"/>
+              </a:ext>
+            </a:extLst>
+          </p:cNvPr>
+          <p:cNvSpPr txBox="1"/>
+          <p:nvPr/>
+        </p:nvSpPr>
+        <p:spPr>
+          <a:xfrm>
+            <a:off x="3169553" y="5107257"/>
+            <a:ext cx="729687" cy="400110"/>
+          </a:xfrm>
+          <a:prstGeom prst="rect">
+            <a:avLst/>
+          </a:prstGeom>
+          <a:noFill/>
+        </p:spPr>
+        <p:txBody>
+          <a:bodyPr wrap="none" rtlCol="0">
+            <a:spAutoFit/>
+          </a:bodyPr>
+          <a:lstStyle/>
+          <a:p>
+            <a:pPr algn="ctr"/>
+            <a:r>
+              <a:rPr lang="en-US" sz="1000" dirty="0"/>
+              <a:t>Hazard</a:t>
+            </a:r>
+          </a:p>
+          <a:p>
+            <a:pPr algn="ctr"/>
+            <a:r>
+              <a:rPr lang="en-US" sz="1000" dirty="0"/>
+              <a:t>Detection</a:t>
+            </a:r>
+          </a:p>
+        </p:txBody>
+      </p:sp>
+      <p:cxnSp>
+        <p:nvCxnSpPr>
+          <p:cNvPr id="118" name="Straight Arrow Connector 117">
+            <a:extLst>
+              <a:ext uri="{FF2B5EF4-FFF2-40B4-BE49-F238E27FC236}">
+                <a16:creationId xmlns:a16="http://schemas.microsoft.com/office/drawing/2014/main" id="{3FFE2C33-996E-7ADF-F9EF-9E2CF7B04F43}"/>
+              </a:ext>
+            </a:extLst>
+          </p:cNvPr>
+          <p:cNvCxnSpPr>
+            <a:cxnSpLocks/>
+          </p:cNvCxnSpPr>
+          <p:nvPr/>
+        </p:nvCxnSpPr>
+        <p:spPr>
+          <a:xfrm>
+            <a:off x="2743887" y="5277871"/>
+            <a:ext cx="442253" cy="0"/>
+          </a:xfrm>
+          <a:prstGeom prst="straightConnector1">
+            <a:avLst/>
+          </a:prstGeom>
+          <a:ln>
+            <a:tailEnd type="triangle"/>
+          </a:ln>
         </p:spPr>
         <p:style>
           <a:lnRef idx="2">
@@ -10760,24 +11278,32 @@
       </p:cxnSp>
       <p:cxnSp>
         <p:nvCxnSpPr>
-          <p:cNvPr id="107" name="Straight Connector 106">
-            <a:extLst>
-              <a:ext uri="{FF2B5EF4-FFF2-40B4-BE49-F238E27FC236}">
-                <a16:creationId xmlns:a16="http://schemas.microsoft.com/office/drawing/2014/main" id="{E6A87E40-A761-8DD0-48F4-7E93FADB35F9}"/>
-              </a:ext>
-            </a:extLst>
-          </p:cNvPr>
-          <p:cNvCxnSpPr/>
+          <p:cNvPr id="119" name="Straight Arrow Connector 118">
+            <a:extLst>
+              <a:ext uri="{FF2B5EF4-FFF2-40B4-BE49-F238E27FC236}">
+                <a16:creationId xmlns:a16="http://schemas.microsoft.com/office/drawing/2014/main" id="{E7E3730A-42E6-0433-39FD-2ACC0255676D}"/>
+              </a:ext>
+            </a:extLst>
+          </p:cNvPr>
+          <p:cNvCxnSpPr>
+            <a:cxnSpLocks/>
+          </p:cNvCxnSpPr>
           <p:nvPr/>
         </p:nvCxnSpPr>
         <p:spPr>
-          <a:xfrm>
-            <a:off x="2985477" y="4912022"/>
-            <a:ext cx="2313354" cy="0"/>
-          </a:xfrm>
-          <a:prstGeom prst="line">
-            <a:avLst/>
-          </a:prstGeom>
+          <a:xfrm flipH="1">
+            <a:off x="3888841" y="5478179"/>
+            <a:ext cx="205614" cy="0"/>
+          </a:xfrm>
+          <a:prstGeom prst="straightConnector1">
+            <a:avLst/>
+          </a:prstGeom>
+          <a:ln>
+            <a:solidFill>
+              <a:srgbClr val="FF0000"/>
+            </a:solidFill>
+            <a:tailEnd type="triangle"/>
+          </a:ln>
         </p:spPr>
         <p:style>
           <a:lnRef idx="2">
@@ -10796,10 +11322,10 @@
       </p:cxnSp>
       <p:cxnSp>
         <p:nvCxnSpPr>
-          <p:cNvPr id="36" name="Straight Arrow Connector 35">
-            <a:extLst>
-              <a:ext uri="{FF2B5EF4-FFF2-40B4-BE49-F238E27FC236}">
-                <a16:creationId xmlns:a16="http://schemas.microsoft.com/office/drawing/2014/main" id="{1EE0AD67-CB2F-1EA8-73F4-A610CE181BCB}"/>
+          <p:cNvPr id="120" name="Straight Connector 119">
+            <a:extLst>
+              <a:ext uri="{FF2B5EF4-FFF2-40B4-BE49-F238E27FC236}">
+                <a16:creationId xmlns:a16="http://schemas.microsoft.com/office/drawing/2014/main" id="{1883FA79-CBE1-81F9-475F-742DC442633A}"/>
               </a:ext>
             </a:extLst>
           </p:cNvPr>
@@ -10809,94 +11335,13 @@
           <p:nvPr/>
         </p:nvCxnSpPr>
         <p:spPr>
-          <a:xfrm flipV="1">
-            <a:off x="9207427" y="4345621"/>
-            <a:ext cx="100338" cy="2498"/>
-          </a:xfrm>
-          <a:prstGeom prst="straightConnector1">
-            <a:avLst/>
-          </a:prstGeom>
-          <a:ln>
-            <a:tailEnd type="triangle"/>
-          </a:ln>
-        </p:spPr>
-        <p:style>
-          <a:lnRef idx="2">
-            <a:schemeClr val="accent1"/>
-          </a:lnRef>
-          <a:fillRef idx="0">
-            <a:schemeClr val="accent1"/>
-          </a:fillRef>
-          <a:effectRef idx="1">
-            <a:schemeClr val="accent1"/>
-          </a:effectRef>
-          <a:fontRef idx="minor">
-            <a:schemeClr val="tx1"/>
-          </a:fontRef>
-        </p:style>
-      </p:cxnSp>
-      <p:sp>
-        <p:nvSpPr>
-          <p:cNvPr id="37" name="TextBox 36">
-            <a:extLst>
-              <a:ext uri="{FF2B5EF4-FFF2-40B4-BE49-F238E27FC236}">
-                <a16:creationId xmlns:a16="http://schemas.microsoft.com/office/drawing/2014/main" id="{FEBD6354-C348-CAC9-89DB-E3F28A4B9C7A}"/>
-              </a:ext>
-            </a:extLst>
-          </p:cNvPr>
-          <p:cNvSpPr txBox="1"/>
-          <p:nvPr/>
-        </p:nvSpPr>
-        <p:spPr>
-          <a:xfrm>
-            <a:off x="8914188" y="4227286"/>
-            <a:ext cx="356188" cy="230832"/>
-          </a:xfrm>
-          <a:prstGeom prst="rect">
-            <a:avLst/>
-          </a:prstGeom>
-          <a:noFill/>
-        </p:spPr>
-        <p:txBody>
-          <a:bodyPr wrap="none" rtlCol="0">
-            <a:spAutoFit/>
-          </a:bodyPr>
-          <a:lstStyle/>
-          <a:p>
-            <a:pPr algn="ctr"/>
-            <a:r>
-              <a:rPr lang="en-US" sz="900" dirty="0"/>
-              <a:t> PC</a:t>
-            </a:r>
-          </a:p>
-        </p:txBody>
-      </p:sp>
-      <p:cxnSp>
-        <p:nvCxnSpPr>
-          <p:cNvPr id="47" name="Straight Arrow Connector 46">
-            <a:extLst>
-              <a:ext uri="{FF2B5EF4-FFF2-40B4-BE49-F238E27FC236}">
-                <a16:creationId xmlns:a16="http://schemas.microsoft.com/office/drawing/2014/main" id="{4C88B74C-2825-380E-71DB-7071BFAD6C6D}"/>
-              </a:ext>
-            </a:extLst>
-          </p:cNvPr>
-          <p:cNvCxnSpPr/>
-          <p:nvPr/>
-        </p:nvCxnSpPr>
-        <p:spPr>
-          <a:xfrm flipV="1">
-            <a:off x="3977662" y="4996009"/>
-            <a:ext cx="0" cy="225402"/>
-          </a:xfrm>
-          <a:prstGeom prst="straightConnector1">
-            <a:avLst/>
-          </a:prstGeom>
-          <a:ln>
-            <a:solidFill>
-              <a:srgbClr val="FF0000"/>
-            </a:solidFill>
-            <a:tailEnd type="triangle"/>
-          </a:ln>
+          <a:xfrm>
+            <a:off x="2763237" y="4519030"/>
+            <a:ext cx="0" cy="761538"/>
+          </a:xfrm>
+          <a:prstGeom prst="line">
+            <a:avLst/>
+          </a:prstGeom>
         </p:spPr>
         <p:style>
           <a:lnRef idx="2">
@@ -10915,10 +11360,51 @@
       </p:cxnSp>
       <p:cxnSp>
         <p:nvCxnSpPr>
-          <p:cNvPr id="53" name="Straight Arrow Connector 52">
-            <a:extLst>
-              <a:ext uri="{FF2B5EF4-FFF2-40B4-BE49-F238E27FC236}">
-                <a16:creationId xmlns:a16="http://schemas.microsoft.com/office/drawing/2014/main" id="{FBA8FA93-D7D6-E677-D331-61BDAA4D72AD}"/>
+          <p:cNvPr id="121" name="Straight Arrow Connector 120">
+            <a:extLst>
+              <a:ext uri="{FF2B5EF4-FFF2-40B4-BE49-F238E27FC236}">
+                <a16:creationId xmlns:a16="http://schemas.microsoft.com/office/drawing/2014/main" id="{D53ADBF7-10DC-5789-46E9-813992762F1C}"/>
+              </a:ext>
+            </a:extLst>
+          </p:cNvPr>
+          <p:cNvCxnSpPr>
+            <a:cxnSpLocks/>
+          </p:cNvCxnSpPr>
+          <p:nvPr/>
+        </p:nvCxnSpPr>
+        <p:spPr>
+          <a:xfrm>
+            <a:off x="2981569" y="5160759"/>
+            <a:ext cx="211703" cy="0"/>
+          </a:xfrm>
+          <a:prstGeom prst="straightConnector1">
+            <a:avLst/>
+          </a:prstGeom>
+          <a:ln>
+            <a:tailEnd type="triangle"/>
+          </a:ln>
+        </p:spPr>
+        <p:style>
+          <a:lnRef idx="2">
+            <a:schemeClr val="accent1"/>
+          </a:lnRef>
+          <a:fillRef idx="0">
+            <a:schemeClr val="accent1"/>
+          </a:fillRef>
+          <a:effectRef idx="1">
+            <a:schemeClr val="accent1"/>
+          </a:effectRef>
+          <a:fontRef idx="minor">
+            <a:schemeClr val="tx1"/>
+          </a:fontRef>
+        </p:style>
+      </p:cxnSp>
+      <p:cxnSp>
+        <p:nvCxnSpPr>
+          <p:cNvPr id="122" name="Straight Connector 121">
+            <a:extLst>
+              <a:ext uri="{FF2B5EF4-FFF2-40B4-BE49-F238E27FC236}">
+                <a16:creationId xmlns:a16="http://schemas.microsoft.com/office/drawing/2014/main" id="{47FF72DD-5839-7297-77B0-F5EC466118C5}"/>
               </a:ext>
             </a:extLst>
           </p:cNvPr>
@@ -10926,9 +11412,117 @@
           <p:nvPr/>
         </p:nvCxnSpPr>
         <p:spPr>
-          <a:xfrm>
-            <a:off x="4019628" y="5487290"/>
-            <a:ext cx="0" cy="200651"/>
+          <a:xfrm flipH="1" flipV="1">
+            <a:off x="2602523" y="4499564"/>
+            <a:ext cx="164123" cy="7703"/>
+          </a:xfrm>
+          <a:prstGeom prst="line">
+            <a:avLst/>
+          </a:prstGeom>
+        </p:spPr>
+        <p:style>
+          <a:lnRef idx="2">
+            <a:schemeClr val="accent1"/>
+          </a:lnRef>
+          <a:fillRef idx="0">
+            <a:schemeClr val="accent1"/>
+          </a:fillRef>
+          <a:effectRef idx="1">
+            <a:schemeClr val="accent1"/>
+          </a:effectRef>
+          <a:fontRef idx="minor">
+            <a:schemeClr val="tx1"/>
+          </a:fontRef>
+        </p:style>
+      </p:cxnSp>
+      <p:cxnSp>
+        <p:nvCxnSpPr>
+          <p:cNvPr id="123" name="Straight Connector 122">
+            <a:extLst>
+              <a:ext uri="{FF2B5EF4-FFF2-40B4-BE49-F238E27FC236}">
+                <a16:creationId xmlns:a16="http://schemas.microsoft.com/office/drawing/2014/main" id="{61CB085F-EFA5-81F0-171A-B0F01423DFC7}"/>
+              </a:ext>
+            </a:extLst>
+          </p:cNvPr>
+          <p:cNvCxnSpPr/>
+          <p:nvPr/>
+        </p:nvCxnSpPr>
+        <p:spPr>
+          <a:xfrm>
+            <a:off x="2989385" y="4912022"/>
+            <a:ext cx="0" cy="253947"/>
+          </a:xfrm>
+          <a:prstGeom prst="line">
+            <a:avLst/>
+          </a:prstGeom>
+        </p:spPr>
+        <p:style>
+          <a:lnRef idx="2">
+            <a:schemeClr val="accent1"/>
+          </a:lnRef>
+          <a:fillRef idx="0">
+            <a:schemeClr val="accent1"/>
+          </a:fillRef>
+          <a:effectRef idx="1">
+            <a:schemeClr val="accent1"/>
+          </a:effectRef>
+          <a:fontRef idx="minor">
+            <a:schemeClr val="tx1"/>
+          </a:fontRef>
+        </p:style>
+      </p:cxnSp>
+      <p:cxnSp>
+        <p:nvCxnSpPr>
+          <p:cNvPr id="124" name="Straight Connector 123">
+            <a:extLst>
+              <a:ext uri="{FF2B5EF4-FFF2-40B4-BE49-F238E27FC236}">
+                <a16:creationId xmlns:a16="http://schemas.microsoft.com/office/drawing/2014/main" id="{A7AA200C-FCA9-EE26-397A-A699E5A6646F}"/>
+              </a:ext>
+            </a:extLst>
+          </p:cNvPr>
+          <p:cNvCxnSpPr/>
+          <p:nvPr/>
+        </p:nvCxnSpPr>
+        <p:spPr>
+          <a:xfrm>
+            <a:off x="2985477" y="4912022"/>
+            <a:ext cx="2313354" cy="0"/>
+          </a:xfrm>
+          <a:prstGeom prst="line">
+            <a:avLst/>
+          </a:prstGeom>
+        </p:spPr>
+        <p:style>
+          <a:lnRef idx="2">
+            <a:schemeClr val="accent1"/>
+          </a:lnRef>
+          <a:fillRef idx="0">
+            <a:schemeClr val="accent1"/>
+          </a:fillRef>
+          <a:effectRef idx="1">
+            <a:schemeClr val="accent1"/>
+          </a:effectRef>
+          <a:fontRef idx="minor">
+            <a:schemeClr val="tx1"/>
+          </a:fontRef>
+        </p:style>
+      </p:cxnSp>
+      <p:cxnSp>
+        <p:nvCxnSpPr>
+          <p:cNvPr id="125" name="Straight Arrow Connector 124">
+            <a:extLst>
+              <a:ext uri="{FF2B5EF4-FFF2-40B4-BE49-F238E27FC236}">
+                <a16:creationId xmlns:a16="http://schemas.microsoft.com/office/drawing/2014/main" id="{EC42D385-1455-5F7D-5DE9-63C32D5B7E54}"/>
+              </a:ext>
+            </a:extLst>
+          </p:cNvPr>
+          <p:cNvCxnSpPr/>
+          <p:nvPr/>
+        </p:nvCxnSpPr>
+        <p:spPr>
+          <a:xfrm flipV="1">
+            <a:off x="3977662" y="4996009"/>
+            <a:ext cx="0" cy="225402"/>
           </a:xfrm>
           <a:prstGeom prst="straightConnector1">
             <a:avLst/>
@@ -10955,6 +11549,178 @@
           </a:fontRef>
         </p:style>
       </p:cxnSp>
+      <p:cxnSp>
+        <p:nvCxnSpPr>
+          <p:cNvPr id="128" name="Straight Arrow Connector 127">
+            <a:extLst>
+              <a:ext uri="{FF2B5EF4-FFF2-40B4-BE49-F238E27FC236}">
+                <a16:creationId xmlns:a16="http://schemas.microsoft.com/office/drawing/2014/main" id="{2FF7584B-44F4-AC4F-1A2B-A5EEAC3183AF}"/>
+              </a:ext>
+            </a:extLst>
+          </p:cNvPr>
+          <p:cNvCxnSpPr/>
+          <p:nvPr/>
+        </p:nvCxnSpPr>
+        <p:spPr>
+          <a:xfrm>
+            <a:off x="4019628" y="5487290"/>
+            <a:ext cx="0" cy="200651"/>
+          </a:xfrm>
+          <a:prstGeom prst="straightConnector1">
+            <a:avLst/>
+          </a:prstGeom>
+          <a:ln>
+            <a:solidFill>
+              <a:srgbClr val="FF0000"/>
+            </a:solidFill>
+            <a:tailEnd type="triangle"/>
+          </a:ln>
+        </p:spPr>
+        <p:style>
+          <a:lnRef idx="2">
+            <a:schemeClr val="accent1"/>
+          </a:lnRef>
+          <a:fillRef idx="0">
+            <a:schemeClr val="accent1"/>
+          </a:fillRef>
+          <a:effectRef idx="1">
+            <a:schemeClr val="accent1"/>
+          </a:effectRef>
+          <a:fontRef idx="minor">
+            <a:schemeClr val="tx1"/>
+          </a:fontRef>
+        </p:style>
+      </p:cxnSp>
+      <p:sp>
+        <p:nvSpPr>
+          <p:cNvPr id="105" name="TextBox 1">
+            <a:extLst>
+              <a:ext uri="{FF2B5EF4-FFF2-40B4-BE49-F238E27FC236}">
+                <a16:creationId xmlns:a16="http://schemas.microsoft.com/office/drawing/2014/main" id="{8150CAF1-DAFF-41B1-37D9-3AA58EDF71DA}"/>
+              </a:ext>
+            </a:extLst>
+          </p:cNvPr>
+          <p:cNvSpPr txBox="1"/>
+          <p:nvPr/>
+        </p:nvSpPr>
+        <p:spPr>
+          <a:xfrm>
+            <a:off x="8659919" y="3413404"/>
+            <a:ext cx="671979" cy="230832"/>
+          </a:xfrm>
+          <a:prstGeom prst="rect">
+            <a:avLst/>
+          </a:prstGeom>
+          <a:noFill/>
+        </p:spPr>
+        <p:txBody>
+          <a:bodyPr wrap="none" rtlCol="0">
+            <a:spAutoFit/>
+          </a:bodyPr>
+          <a:lstStyle>
+            <a:defPPr>
+              <a:defRPr lang="en-US"/>
+            </a:defPPr>
+            <a:lvl1pPr marL="0" algn="l" defTabSz="914400" rtl="0" eaLnBrk="1" latinLnBrk="0" hangingPunct="1">
+              <a:defRPr sz="1800" kern="1200">
+                <a:solidFill>
+                  <a:schemeClr val="tx1"/>
+                </a:solidFill>
+                <a:latin typeface="+mn-lt"/>
+                <a:ea typeface="+mn-ea"/>
+                <a:cs typeface="+mn-cs"/>
+              </a:defRPr>
+            </a:lvl1pPr>
+            <a:lvl2pPr marL="457200" algn="l" defTabSz="914400" rtl="0" eaLnBrk="1" latinLnBrk="0" hangingPunct="1">
+              <a:defRPr sz="1800" kern="1200">
+                <a:solidFill>
+                  <a:schemeClr val="tx1"/>
+                </a:solidFill>
+                <a:latin typeface="+mn-lt"/>
+                <a:ea typeface="+mn-ea"/>
+                <a:cs typeface="+mn-cs"/>
+              </a:defRPr>
+            </a:lvl2pPr>
+            <a:lvl3pPr marL="914400" algn="l" defTabSz="914400" rtl="0" eaLnBrk="1" latinLnBrk="0" hangingPunct="1">
+              <a:defRPr sz="1800" kern="1200">
+                <a:solidFill>
+                  <a:schemeClr val="tx1"/>
+                </a:solidFill>
+                <a:latin typeface="+mn-lt"/>
+                <a:ea typeface="+mn-ea"/>
+                <a:cs typeface="+mn-cs"/>
+              </a:defRPr>
+            </a:lvl3pPr>
+            <a:lvl4pPr marL="1371600" algn="l" defTabSz="914400" rtl="0" eaLnBrk="1" latinLnBrk="0" hangingPunct="1">
+              <a:defRPr sz="1800" kern="1200">
+                <a:solidFill>
+                  <a:schemeClr val="tx1"/>
+                </a:solidFill>
+                <a:latin typeface="+mn-lt"/>
+                <a:ea typeface="+mn-ea"/>
+                <a:cs typeface="+mn-cs"/>
+              </a:defRPr>
+            </a:lvl4pPr>
+            <a:lvl5pPr marL="1828800" algn="l" defTabSz="914400" rtl="0" eaLnBrk="1" latinLnBrk="0" hangingPunct="1">
+              <a:defRPr sz="1800" kern="1200">
+                <a:solidFill>
+                  <a:schemeClr val="tx1"/>
+                </a:solidFill>
+                <a:latin typeface="+mn-lt"/>
+                <a:ea typeface="+mn-ea"/>
+                <a:cs typeface="+mn-cs"/>
+              </a:defRPr>
+            </a:lvl5pPr>
+            <a:lvl6pPr marL="2286000" algn="l" defTabSz="914400" rtl="0" eaLnBrk="1" latinLnBrk="0" hangingPunct="1">
+              <a:defRPr sz="1800" kern="1200">
+                <a:solidFill>
+                  <a:schemeClr val="tx1"/>
+                </a:solidFill>
+                <a:latin typeface="+mn-lt"/>
+                <a:ea typeface="+mn-ea"/>
+                <a:cs typeface="+mn-cs"/>
+              </a:defRPr>
+            </a:lvl6pPr>
+            <a:lvl7pPr marL="2743200" algn="l" defTabSz="914400" rtl="0" eaLnBrk="1" latinLnBrk="0" hangingPunct="1">
+              <a:defRPr sz="1800" kern="1200">
+                <a:solidFill>
+                  <a:schemeClr val="tx1"/>
+                </a:solidFill>
+                <a:latin typeface="+mn-lt"/>
+                <a:ea typeface="+mn-ea"/>
+                <a:cs typeface="+mn-cs"/>
+              </a:defRPr>
+            </a:lvl7pPr>
+            <a:lvl8pPr marL="3200400" algn="l" defTabSz="914400" rtl="0" eaLnBrk="1" latinLnBrk="0" hangingPunct="1">
+              <a:defRPr sz="1800" kern="1200">
+                <a:solidFill>
+                  <a:schemeClr val="tx1"/>
+                </a:solidFill>
+                <a:latin typeface="+mn-lt"/>
+                <a:ea typeface="+mn-ea"/>
+                <a:cs typeface="+mn-cs"/>
+              </a:defRPr>
+            </a:lvl8pPr>
+            <a:lvl9pPr marL="3657600" algn="l" defTabSz="914400" rtl="0" eaLnBrk="1" latinLnBrk="0" hangingPunct="1">
+              <a:defRPr sz="1800" kern="1200">
+                <a:solidFill>
+                  <a:schemeClr val="tx1"/>
+                </a:solidFill>
+                <a:latin typeface="+mn-lt"/>
+                <a:ea typeface="+mn-ea"/>
+                <a:cs typeface="+mn-cs"/>
+              </a:defRPr>
+            </a:lvl9pPr>
+          </a:lstStyle>
+          <a:p>
+            <a:pPr algn="ctr"/>
+            <a:r>
+              <a:rPr lang="en-US" sz="900" dirty="0"/>
+              <a:t>Not equal</a:t>
+            </a:r>
+          </a:p>
+        </p:txBody>
+      </p:sp>
     </p:spTree>
     <p:extLst>
       <p:ext uri="{BB962C8B-B14F-4D97-AF65-F5344CB8AC3E}">
@@ -11281,4 +12047,10 @@
     </a:ext>
   </a:extLst>
 </a:theme>
+</file>
+
+<file path=docMetadata/LabelInfo.xml><?xml version="1.0" encoding="utf-8"?>
+<clbl:labelList xmlns:clbl="http://schemas.microsoft.com/office/2020/mipLabelMetadata">
+  <clbl:label id="{7ab80a06-f029-45c0-84d1-7dad19ce3c61}" enabled="0" method="" siteId="{7ab80a06-f029-45c0-84d1-7dad19ce3c61}" removed="1"/>
+</clbl:labelList>
 </file>
--- a/RISCVstage3.pptx
+++ b/RISCVstage3.pptx
@@ -648,7 +648,7 @@
           <a:p>
             <a:fld id="{51AFF834-1BEC-4F95-9622-28B5DCC1FE16}" type="datetimeFigureOut">
               <a:rPr lang="en-US" smtClean="0"/>
-              <a:t>4/7/2026</a:t>
+              <a:t>4/25/2026</a:t>
             </a:fld>
             <a:endParaRPr lang="en-US"/>
           </a:p>
@@ -846,7 +846,7 @@
           <a:p>
             <a:fld id="{51AFF834-1BEC-4F95-9622-28B5DCC1FE16}" type="datetimeFigureOut">
               <a:rPr lang="en-US" smtClean="0"/>
-              <a:t>4/7/2026</a:t>
+              <a:t>4/25/2026</a:t>
             </a:fld>
             <a:endParaRPr lang="en-US"/>
           </a:p>
@@ -1054,7 +1054,7 @@
           <a:p>
             <a:fld id="{51AFF834-1BEC-4F95-9622-28B5DCC1FE16}" type="datetimeFigureOut">
               <a:rPr lang="en-US" smtClean="0"/>
-              <a:t>4/7/2026</a:t>
+              <a:t>4/25/2026</a:t>
             </a:fld>
             <a:endParaRPr lang="en-US"/>
           </a:p>
@@ -1252,7 +1252,7 @@
           <a:p>
             <a:fld id="{51AFF834-1BEC-4F95-9622-28B5DCC1FE16}" type="datetimeFigureOut">
               <a:rPr lang="en-US" smtClean="0"/>
-              <a:t>4/7/2026</a:t>
+              <a:t>4/25/2026</a:t>
             </a:fld>
             <a:endParaRPr lang="en-US"/>
           </a:p>
@@ -1527,7 +1527,7 @@
           <a:p>
             <a:fld id="{51AFF834-1BEC-4F95-9622-28B5DCC1FE16}" type="datetimeFigureOut">
               <a:rPr lang="en-US" smtClean="0"/>
-              <a:t>4/7/2026</a:t>
+              <a:t>4/25/2026</a:t>
             </a:fld>
             <a:endParaRPr lang="en-US"/>
           </a:p>
@@ -1792,7 +1792,7 @@
           <a:p>
             <a:fld id="{51AFF834-1BEC-4F95-9622-28B5DCC1FE16}" type="datetimeFigureOut">
               <a:rPr lang="en-US" smtClean="0"/>
-              <a:t>4/7/2026</a:t>
+              <a:t>4/25/2026</a:t>
             </a:fld>
             <a:endParaRPr lang="en-US"/>
           </a:p>
@@ -2204,7 +2204,7 @@
           <a:p>
             <a:fld id="{51AFF834-1BEC-4F95-9622-28B5DCC1FE16}" type="datetimeFigureOut">
               <a:rPr lang="en-US" smtClean="0"/>
-              <a:t>4/7/2026</a:t>
+              <a:t>4/25/2026</a:t>
             </a:fld>
             <a:endParaRPr lang="en-US"/>
           </a:p>
@@ -2345,7 +2345,7 @@
           <a:p>
             <a:fld id="{51AFF834-1BEC-4F95-9622-28B5DCC1FE16}" type="datetimeFigureOut">
               <a:rPr lang="en-US" smtClean="0"/>
-              <a:t>4/7/2026</a:t>
+              <a:t>4/25/2026</a:t>
             </a:fld>
             <a:endParaRPr lang="en-US"/>
           </a:p>
@@ -2458,7 +2458,7 @@
           <a:p>
             <a:fld id="{51AFF834-1BEC-4F95-9622-28B5DCC1FE16}" type="datetimeFigureOut">
               <a:rPr lang="en-US" smtClean="0"/>
-              <a:t>4/7/2026</a:t>
+              <a:t>4/25/2026</a:t>
             </a:fld>
             <a:endParaRPr lang="en-US"/>
           </a:p>
@@ -2769,7 +2769,7 @@
           <a:p>
             <a:fld id="{51AFF834-1BEC-4F95-9622-28B5DCC1FE16}" type="datetimeFigureOut">
               <a:rPr lang="en-US" smtClean="0"/>
-              <a:t>4/7/2026</a:t>
+              <a:t>4/25/2026</a:t>
             </a:fld>
             <a:endParaRPr lang="en-US"/>
           </a:p>
@@ -3057,7 +3057,7 @@
           <a:p>
             <a:fld id="{51AFF834-1BEC-4F95-9622-28B5DCC1FE16}" type="datetimeFigureOut">
               <a:rPr lang="en-US" smtClean="0"/>
-              <a:t>4/7/2026</a:t>
+              <a:t>4/25/2026</a:t>
             </a:fld>
             <a:endParaRPr lang="en-US"/>
           </a:p>
@@ -3298,7 +3298,7 @@
           <a:p>
             <a:fld id="{51AFF834-1BEC-4F95-9622-28B5DCC1FE16}" type="datetimeFigureOut">
               <a:rPr lang="en-US" smtClean="0"/>
-              <a:t>4/7/2026</a:t>
+              <a:t>4/25/2026</a:t>
             </a:fld>
             <a:endParaRPr lang="en-US"/>
           </a:p>
@@ -5602,7 +5602,7 @@
         <p:spPr>
           <a:xfrm>
             <a:off x="1620962" y="4519030"/>
-            <a:ext cx="475825" cy="0"/>
+            <a:ext cx="382936" cy="0"/>
           </a:xfrm>
           <a:prstGeom prst="straightConnector1">
             <a:avLst/>
@@ -7414,13 +7414,16 @@
               </a:ext>
             </a:extLst>
           </p:cNvPr>
-          <p:cNvCxnSpPr/>
+          <p:cNvCxnSpPr>
+            <a:cxnSpLocks/>
+            <a:stCxn id="34" idx="0"/>
+          </p:cNvCxnSpPr>
           <p:nvPr/>
         </p:nvCxnSpPr>
         <p:spPr>
           <a:xfrm flipV="1">
-            <a:off x="5804838" y="3309402"/>
-            <a:ext cx="0" cy="173037"/>
+            <a:off x="5794597" y="3309402"/>
+            <a:ext cx="0" cy="218749"/>
           </a:xfrm>
           <a:prstGeom prst="straightConnector1">
             <a:avLst/>
@@ -9187,48 +9190,6 @@
           </a:p>
         </p:txBody>
       </p:sp>
-      <p:cxnSp>
-        <p:nvCxnSpPr>
-          <p:cNvPr id="38" name="Straight Arrow Connector 37">
-            <a:extLst>
-              <a:ext uri="{FF2B5EF4-FFF2-40B4-BE49-F238E27FC236}">
-                <a16:creationId xmlns:a16="http://schemas.microsoft.com/office/drawing/2014/main" id="{4D9B3B66-045C-4BC7-2F4D-857D0D686CD3}"/>
-              </a:ext>
-            </a:extLst>
-          </p:cNvPr>
-          <p:cNvCxnSpPr/>
-          <p:nvPr/>
-        </p:nvCxnSpPr>
-        <p:spPr>
-          <a:xfrm>
-            <a:off x="3209831" y="3367023"/>
-            <a:ext cx="177808" cy="0"/>
-          </a:xfrm>
-          <a:prstGeom prst="straightConnector1">
-            <a:avLst/>
-          </a:prstGeom>
-          <a:ln>
-            <a:solidFill>
-              <a:srgbClr val="FF0000"/>
-            </a:solidFill>
-            <a:tailEnd type="triangle"/>
-          </a:ln>
-        </p:spPr>
-        <p:style>
-          <a:lnRef idx="2">
-            <a:schemeClr val="accent1"/>
-          </a:lnRef>
-          <a:fillRef idx="0">
-            <a:schemeClr val="accent1"/>
-          </a:fillRef>
-          <a:effectRef idx="1">
-            <a:schemeClr val="accent1"/>
-          </a:effectRef>
-          <a:fontRef idx="minor">
-            <a:schemeClr val="tx1"/>
-          </a:fontRef>
-        </p:style>
-      </p:cxnSp>
       <p:sp>
         <p:nvSpPr>
           <p:cNvPr id="106" name="Rectangle 105">
@@ -9474,16 +9435,19 @@
           </p:cNvPr>
           <p:cNvCxnSpPr>
             <a:cxnSpLocks/>
+            <a:stCxn id="196" idx="0"/>
           </p:cNvCxnSpPr>
           <p:nvPr/>
         </p:nvCxnSpPr>
         <p:spPr>
-          <a:xfrm>
-            <a:off x="2731530" y="5071925"/>
-            <a:ext cx="442253" cy="0"/>
-          </a:xfrm>
-          <a:prstGeom prst="straightConnector1">
-            <a:avLst/>
+          <a:xfrm rot="5400000" flipH="1" flipV="1">
+            <a:off x="2742354" y="5096744"/>
+            <a:ext cx="443548" cy="419310"/>
+          </a:xfrm>
+          <a:prstGeom prst="bentConnector3">
+            <a:avLst>
+              <a:gd name="adj1" fmla="val 99711"/>
+            </a:avLst>
           </a:prstGeom>
           <a:ln>
             <a:solidFill>
@@ -9553,49 +9517,6 @@
       </p:cxnSp>
       <p:cxnSp>
         <p:nvCxnSpPr>
-          <p:cNvPr id="120" name="Straight Connector 119">
-            <a:extLst>
-              <a:ext uri="{FF2B5EF4-FFF2-40B4-BE49-F238E27FC236}">
-                <a16:creationId xmlns:a16="http://schemas.microsoft.com/office/drawing/2014/main" id="{1883FA79-CBE1-81F9-475F-742DC442633A}"/>
-              </a:ext>
-            </a:extLst>
-          </p:cNvPr>
-          <p:cNvCxnSpPr>
-            <a:cxnSpLocks/>
-          </p:cNvCxnSpPr>
-          <p:nvPr/>
-        </p:nvCxnSpPr>
-        <p:spPr>
-          <a:xfrm>
-            <a:off x="2742642" y="4702781"/>
-            <a:ext cx="0" cy="367608"/>
-          </a:xfrm>
-          <a:prstGeom prst="line">
-            <a:avLst/>
-          </a:prstGeom>
-          <a:ln>
-            <a:solidFill>
-              <a:srgbClr val="FF0000"/>
-            </a:solidFill>
-          </a:ln>
-        </p:spPr>
-        <p:style>
-          <a:lnRef idx="2">
-            <a:schemeClr val="accent1"/>
-          </a:lnRef>
-          <a:fillRef idx="0">
-            <a:schemeClr val="accent1"/>
-          </a:fillRef>
-          <a:effectRef idx="1">
-            <a:schemeClr val="accent1"/>
-          </a:effectRef>
-          <a:fontRef idx="minor">
-            <a:schemeClr val="tx1"/>
-          </a:fontRef>
-        </p:style>
-      </p:cxnSp>
-      <p:cxnSp>
-        <p:nvCxnSpPr>
           <p:cNvPr id="121" name="Straight Arrow Connector 120">
             <a:extLst>
               <a:ext uri="{FF2B5EF4-FFF2-40B4-BE49-F238E27FC236}">
@@ -9621,49 +9542,6 @@
               <a:srgbClr val="FF0000"/>
             </a:solidFill>
             <a:tailEnd type="triangle"/>
-          </a:ln>
-        </p:spPr>
-        <p:style>
-          <a:lnRef idx="2">
-            <a:schemeClr val="accent1"/>
-          </a:lnRef>
-          <a:fillRef idx="0">
-            <a:schemeClr val="accent1"/>
-          </a:fillRef>
-          <a:effectRef idx="1">
-            <a:schemeClr val="accent1"/>
-          </a:effectRef>
-          <a:fontRef idx="minor">
-            <a:schemeClr val="tx1"/>
-          </a:fontRef>
-        </p:style>
-      </p:cxnSp>
-      <p:cxnSp>
-        <p:nvCxnSpPr>
-          <p:cNvPr id="122" name="Straight Connector 121">
-            <a:extLst>
-              <a:ext uri="{FF2B5EF4-FFF2-40B4-BE49-F238E27FC236}">
-                <a16:creationId xmlns:a16="http://schemas.microsoft.com/office/drawing/2014/main" id="{47FF72DD-5839-7297-77B0-F5EC466118C5}"/>
-              </a:ext>
-            </a:extLst>
-          </p:cNvPr>
-          <p:cNvCxnSpPr>
-            <a:cxnSpLocks/>
-          </p:cNvCxnSpPr>
-          <p:nvPr/>
-        </p:nvCxnSpPr>
-        <p:spPr>
-          <a:xfrm flipH="1">
-            <a:off x="2332953" y="4719577"/>
-            <a:ext cx="398618" cy="0"/>
-          </a:xfrm>
-          <a:prstGeom prst="line">
-            <a:avLst/>
-          </a:prstGeom>
-          <a:ln>
-            <a:solidFill>
-              <a:srgbClr val="FF0000"/>
-            </a:solidFill>
           </a:ln>
         </p:spPr>
         <p:style>
@@ -11744,6 +11622,1284 @@
               <a:t>start_stall</a:t>
             </a:r>
             <a:endParaRPr lang="en-US" sz="1000" dirty="0"/>
+          </a:p>
+        </p:txBody>
+      </p:sp>
+      <p:sp>
+        <p:nvSpPr>
+          <p:cNvPr id="28" name="TextBox 27">
+            <a:extLst>
+              <a:ext uri="{FF2B5EF4-FFF2-40B4-BE49-F238E27FC236}">
+                <a16:creationId xmlns:a16="http://schemas.microsoft.com/office/drawing/2014/main" id="{7E037F9B-E793-5DE7-2D91-D0C5224DCE84}"/>
+              </a:ext>
+            </a:extLst>
+          </p:cNvPr>
+          <p:cNvSpPr txBox="1"/>
+          <p:nvPr/>
+        </p:nvSpPr>
+        <p:spPr>
+          <a:xfrm>
+            <a:off x="4257837" y="2942995"/>
+            <a:ext cx="676788" cy="230832"/>
+          </a:xfrm>
+          <a:prstGeom prst="rect">
+            <a:avLst/>
+          </a:prstGeom>
+          <a:noFill/>
+        </p:spPr>
+        <p:txBody>
+          <a:bodyPr wrap="none" rtlCol="0">
+            <a:spAutoFit/>
+          </a:bodyPr>
+          <a:lstStyle/>
+          <a:p>
+            <a:pPr algn="ctr"/>
+            <a:r>
+              <a:rPr lang="en-US" sz="900" dirty="0"/>
+              <a:t>reg2_data</a:t>
+            </a:r>
+          </a:p>
+        </p:txBody>
+      </p:sp>
+      <p:sp>
+        <p:nvSpPr>
+          <p:cNvPr id="30" name="TextBox 29">
+            <a:extLst>
+              <a:ext uri="{FF2B5EF4-FFF2-40B4-BE49-F238E27FC236}">
+                <a16:creationId xmlns:a16="http://schemas.microsoft.com/office/drawing/2014/main" id="{DABBECEA-87CC-A681-63F5-A79CEB5198EB}"/>
+              </a:ext>
+            </a:extLst>
+          </p:cNvPr>
+          <p:cNvSpPr txBox="1"/>
+          <p:nvPr/>
+        </p:nvSpPr>
+        <p:spPr>
+          <a:xfrm>
+            <a:off x="4223159" y="2506128"/>
+            <a:ext cx="676788" cy="230832"/>
+          </a:xfrm>
+          <a:prstGeom prst="rect">
+            <a:avLst/>
+          </a:prstGeom>
+          <a:noFill/>
+        </p:spPr>
+        <p:txBody>
+          <a:bodyPr wrap="none" rtlCol="0">
+            <a:spAutoFit/>
+          </a:bodyPr>
+          <a:lstStyle/>
+          <a:p>
+            <a:pPr algn="ctr"/>
+            <a:r>
+              <a:rPr lang="en-US" sz="900" dirty="0"/>
+              <a:t>reg1_data</a:t>
+            </a:r>
+          </a:p>
+        </p:txBody>
+      </p:sp>
+      <p:sp>
+        <p:nvSpPr>
+          <p:cNvPr id="32" name="TextBox 31">
+            <a:extLst>
+              <a:ext uri="{FF2B5EF4-FFF2-40B4-BE49-F238E27FC236}">
+                <a16:creationId xmlns:a16="http://schemas.microsoft.com/office/drawing/2014/main" id="{36BC9354-1AE5-EC7C-FFAA-7ED9A8590E46}"/>
+              </a:ext>
+            </a:extLst>
+          </p:cNvPr>
+          <p:cNvSpPr txBox="1"/>
+          <p:nvPr/>
+        </p:nvSpPr>
+        <p:spPr>
+          <a:xfrm>
+            <a:off x="5899068" y="3400264"/>
+            <a:ext cx="833883" cy="230832"/>
+          </a:xfrm>
+          <a:prstGeom prst="rect">
+            <a:avLst/>
+          </a:prstGeom>
+          <a:noFill/>
+        </p:spPr>
+        <p:txBody>
+          <a:bodyPr wrap="none" rtlCol="0">
+            <a:spAutoFit/>
+          </a:bodyPr>
+          <a:lstStyle/>
+          <a:p>
+            <a:pPr algn="ctr"/>
+            <a:r>
+              <a:rPr lang="en-US" sz="900" dirty="0" err="1"/>
+              <a:t>id_ex_alu_op</a:t>
+            </a:r>
+            <a:endParaRPr lang="en-US" sz="900" dirty="0"/>
+          </a:p>
+        </p:txBody>
+      </p:sp>
+      <p:sp>
+        <p:nvSpPr>
+          <p:cNvPr id="34" name="TextBox 33">
+            <a:extLst>
+              <a:ext uri="{FF2B5EF4-FFF2-40B4-BE49-F238E27FC236}">
+                <a16:creationId xmlns:a16="http://schemas.microsoft.com/office/drawing/2014/main" id="{8CFEE426-A993-2243-37EC-1C483B64037F}"/>
+              </a:ext>
+            </a:extLst>
+          </p:cNvPr>
+          <p:cNvSpPr txBox="1"/>
+          <p:nvPr/>
+        </p:nvSpPr>
+        <p:spPr>
+          <a:xfrm>
+            <a:off x="5364030" y="3528151"/>
+            <a:ext cx="861133" cy="230832"/>
+          </a:xfrm>
+          <a:prstGeom prst="rect">
+            <a:avLst/>
+          </a:prstGeom>
+          <a:noFill/>
+        </p:spPr>
+        <p:txBody>
+          <a:bodyPr wrap="none" rtlCol="0">
+            <a:spAutoFit/>
+          </a:bodyPr>
+          <a:lstStyle/>
+          <a:p>
+            <a:pPr algn="ctr"/>
+            <a:r>
+              <a:rPr lang="en-US" sz="900" dirty="0" err="1"/>
+              <a:t>id_ex_alu_src</a:t>
+            </a:r>
+            <a:endParaRPr lang="en-US" sz="900" dirty="0"/>
+          </a:p>
+        </p:txBody>
+      </p:sp>
+      <p:sp>
+        <p:nvSpPr>
+          <p:cNvPr id="36" name="TextBox 35">
+            <a:extLst>
+              <a:ext uri="{FF2B5EF4-FFF2-40B4-BE49-F238E27FC236}">
+                <a16:creationId xmlns:a16="http://schemas.microsoft.com/office/drawing/2014/main" id="{A4AB6547-4126-2A78-3C6E-14A61D8EA865}"/>
+              </a:ext>
+            </a:extLst>
+          </p:cNvPr>
+          <p:cNvSpPr txBox="1"/>
+          <p:nvPr/>
+        </p:nvSpPr>
+        <p:spPr>
+          <a:xfrm>
+            <a:off x="2948822" y="3622999"/>
+            <a:ext cx="1238296" cy="230832"/>
+          </a:xfrm>
+          <a:prstGeom prst="rect">
+            <a:avLst/>
+          </a:prstGeom>
+          <a:noFill/>
+        </p:spPr>
+        <p:txBody>
+          <a:bodyPr wrap="square" rtlCol="0">
+            <a:spAutoFit/>
+          </a:bodyPr>
+          <a:lstStyle/>
+          <a:p>
+            <a:pPr algn="ctr"/>
+            <a:r>
+              <a:rPr lang="en-US" sz="900" dirty="0" err="1"/>
+              <a:t>mem_wb_reg_write</a:t>
+            </a:r>
+            <a:endParaRPr lang="en-US" sz="900" dirty="0"/>
+          </a:p>
+        </p:txBody>
+      </p:sp>
+      <p:cxnSp>
+        <p:nvCxnSpPr>
+          <p:cNvPr id="37" name="Straight Arrow Connector 37">
+            <a:extLst>
+              <a:ext uri="{FF2B5EF4-FFF2-40B4-BE49-F238E27FC236}">
+                <a16:creationId xmlns:a16="http://schemas.microsoft.com/office/drawing/2014/main" id="{AA6CA86F-814D-E3DD-7823-CEFD4888EDF8}"/>
+              </a:ext>
+            </a:extLst>
+          </p:cNvPr>
+          <p:cNvCxnSpPr>
+            <a:cxnSpLocks/>
+          </p:cNvCxnSpPr>
+          <p:nvPr/>
+        </p:nvCxnSpPr>
+        <p:spPr>
+          <a:xfrm rot="10800000" flipH="1">
+            <a:off x="2948821" y="3394567"/>
+            <a:ext cx="438815" cy="343848"/>
+          </a:xfrm>
+          <a:prstGeom prst="bentConnector3">
+            <a:avLst>
+              <a:gd name="adj1" fmla="val -52095"/>
+            </a:avLst>
+          </a:prstGeom>
+          <a:ln>
+            <a:solidFill>
+              <a:srgbClr val="FF0000"/>
+            </a:solidFill>
+            <a:tailEnd type="triangle"/>
+          </a:ln>
+        </p:spPr>
+        <p:style>
+          <a:lnRef idx="2">
+            <a:schemeClr val="accent1"/>
+          </a:lnRef>
+          <a:fillRef idx="0">
+            <a:schemeClr val="accent1"/>
+          </a:fillRef>
+          <a:effectRef idx="1">
+            <a:schemeClr val="accent1"/>
+          </a:effectRef>
+          <a:fontRef idx="minor">
+            <a:schemeClr val="tx1"/>
+          </a:fontRef>
+        </p:style>
+      </p:cxnSp>
+      <p:sp>
+        <p:nvSpPr>
+          <p:cNvPr id="39" name="TextBox 38">
+            <a:extLst>
+              <a:ext uri="{FF2B5EF4-FFF2-40B4-BE49-F238E27FC236}">
+                <a16:creationId xmlns:a16="http://schemas.microsoft.com/office/drawing/2014/main" id="{CDB6D6E0-14B0-5D8D-FFFD-F5173F42530E}"/>
+              </a:ext>
+            </a:extLst>
+          </p:cNvPr>
+          <p:cNvSpPr txBox="1"/>
+          <p:nvPr/>
+        </p:nvSpPr>
+        <p:spPr>
+          <a:xfrm>
+            <a:off x="1780040" y="3542972"/>
+            <a:ext cx="841032" cy="1061829"/>
+          </a:xfrm>
+          <a:prstGeom prst="rect">
+            <a:avLst/>
+          </a:prstGeom>
+          <a:noFill/>
+        </p:spPr>
+        <p:txBody>
+          <a:bodyPr wrap="square" rtlCol="0">
+            <a:spAutoFit/>
+          </a:bodyPr>
+          <a:lstStyle/>
+          <a:p>
+            <a:pPr algn="ctr"/>
+            <a:r>
+              <a:rPr lang="en-US" sz="900" dirty="0" err="1"/>
+              <a:t>Reg_write</a:t>
+            </a:r>
+            <a:r>
+              <a:rPr lang="en-US" sz="900" dirty="0"/>
+              <a:t>, </a:t>
+            </a:r>
+            <a:r>
+              <a:rPr lang="en-US" sz="900" dirty="0" err="1"/>
+              <a:t>mem_read</a:t>
+            </a:r>
+            <a:r>
+              <a:rPr lang="en-US" sz="900" dirty="0"/>
+              <a:t>, </a:t>
+            </a:r>
+            <a:r>
+              <a:rPr lang="en-US" sz="900" dirty="0" err="1"/>
+              <a:t>mem_write</a:t>
+            </a:r>
+            <a:r>
+              <a:rPr lang="en-US" sz="900" dirty="0"/>
+              <a:t>, </a:t>
+            </a:r>
+            <a:r>
+              <a:rPr lang="en-US" sz="900" dirty="0" err="1"/>
+              <a:t>alu_src</a:t>
+            </a:r>
+            <a:r>
+              <a:rPr lang="en-US" sz="900" dirty="0"/>
+              <a:t>, branch, </a:t>
+            </a:r>
+            <a:r>
+              <a:rPr lang="en-US" sz="900" dirty="0" err="1"/>
+              <a:t>load_addr</a:t>
+            </a:r>
+            <a:r>
+              <a:rPr lang="en-US" sz="900" dirty="0"/>
+              <a:t>, jump</a:t>
+            </a:r>
+          </a:p>
+        </p:txBody>
+      </p:sp>
+      <p:sp>
+        <p:nvSpPr>
+          <p:cNvPr id="47" name="TextBox 46">
+            <a:extLst>
+              <a:ext uri="{FF2B5EF4-FFF2-40B4-BE49-F238E27FC236}">
+                <a16:creationId xmlns:a16="http://schemas.microsoft.com/office/drawing/2014/main" id="{9DD407B3-B8D7-E1D6-74F0-255C2DFDB661}"/>
+              </a:ext>
+            </a:extLst>
+          </p:cNvPr>
+          <p:cNvSpPr txBox="1"/>
+          <p:nvPr/>
+        </p:nvSpPr>
+        <p:spPr>
+          <a:xfrm>
+            <a:off x="7808124" y="2540481"/>
+            <a:ext cx="1218603" cy="369332"/>
+          </a:xfrm>
+          <a:prstGeom prst="rect">
+            <a:avLst/>
+          </a:prstGeom>
+          <a:noFill/>
+        </p:spPr>
+        <p:txBody>
+          <a:bodyPr wrap="none" rtlCol="0">
+            <a:spAutoFit/>
+          </a:bodyPr>
+          <a:lstStyle/>
+          <a:p>
+            <a:pPr algn="r"/>
+            <a:r>
+              <a:rPr lang="en-US" sz="900" dirty="0" err="1"/>
+              <a:t>Ex_mem_mem_read</a:t>
+            </a:r>
+            <a:endParaRPr lang="en-US" sz="900" dirty="0"/>
+          </a:p>
+          <a:p>
+            <a:pPr algn="r"/>
+            <a:r>
+              <a:rPr lang="en-US" sz="900" dirty="0" err="1"/>
+              <a:t>Ex_mem_mem_write</a:t>
+            </a:r>
+            <a:endParaRPr lang="en-US" sz="900" dirty="0"/>
+          </a:p>
+        </p:txBody>
+      </p:sp>
+      <p:sp>
+        <p:nvSpPr>
+          <p:cNvPr id="52" name="TextBox 51">
+            <a:extLst>
+              <a:ext uri="{FF2B5EF4-FFF2-40B4-BE49-F238E27FC236}">
+                <a16:creationId xmlns:a16="http://schemas.microsoft.com/office/drawing/2014/main" id="{D5A553ED-AB43-0F8D-FE9C-50E58065AA5A}"/>
+              </a:ext>
+            </a:extLst>
+          </p:cNvPr>
+          <p:cNvSpPr txBox="1"/>
+          <p:nvPr/>
+        </p:nvSpPr>
+        <p:spPr>
+          <a:xfrm>
+            <a:off x="10150564" y="3883242"/>
+            <a:ext cx="1323237" cy="507831"/>
+          </a:xfrm>
+          <a:prstGeom prst="rect">
+            <a:avLst/>
+          </a:prstGeom>
+          <a:noFill/>
+        </p:spPr>
+        <p:txBody>
+          <a:bodyPr wrap="square" rtlCol="0">
+            <a:spAutoFit/>
+          </a:bodyPr>
+          <a:lstStyle/>
+          <a:p>
+            <a:pPr algn="ctr"/>
+            <a:r>
+              <a:rPr lang="en-US" sz="900" dirty="0" err="1"/>
+              <a:t>Mem_wb_mem_read</a:t>
+            </a:r>
+            <a:endParaRPr lang="en-US" sz="900" dirty="0"/>
+          </a:p>
+          <a:p>
+            <a:pPr algn="ctr"/>
+            <a:r>
+              <a:rPr lang="en-US" sz="900" dirty="0" err="1"/>
+              <a:t>Mem_wb_load_addr</a:t>
+            </a:r>
+            <a:endParaRPr lang="en-US" sz="900" dirty="0"/>
+          </a:p>
+          <a:p>
+            <a:pPr algn="ctr"/>
+            <a:r>
+              <a:rPr lang="en-US" sz="900" dirty="0" err="1"/>
+              <a:t>Mem_wb_reg_write</a:t>
+            </a:r>
+            <a:endParaRPr lang="en-US" sz="900" dirty="0"/>
+          </a:p>
+        </p:txBody>
+      </p:sp>
+      <p:sp>
+        <p:nvSpPr>
+          <p:cNvPr id="53" name="TextBox 52">
+            <a:extLst>
+              <a:ext uri="{FF2B5EF4-FFF2-40B4-BE49-F238E27FC236}">
+                <a16:creationId xmlns:a16="http://schemas.microsoft.com/office/drawing/2014/main" id="{82ADEE4E-531E-BEED-C655-A5AFD5DC36C9}"/>
+              </a:ext>
+            </a:extLst>
+          </p:cNvPr>
+          <p:cNvSpPr txBox="1"/>
+          <p:nvPr/>
+        </p:nvSpPr>
+        <p:spPr>
+          <a:xfrm>
+            <a:off x="11073075" y="2725346"/>
+            <a:ext cx="607859" cy="230832"/>
+          </a:xfrm>
+          <a:prstGeom prst="rect">
+            <a:avLst/>
+          </a:prstGeom>
+          <a:noFill/>
+        </p:spPr>
+        <p:txBody>
+          <a:bodyPr wrap="none" rtlCol="0">
+            <a:spAutoFit/>
+          </a:bodyPr>
+          <a:lstStyle/>
+          <a:p>
+            <a:pPr algn="ctr"/>
+            <a:r>
+              <a:rPr lang="en-US" sz="900" dirty="0" err="1"/>
+              <a:t>wb_data</a:t>
+            </a:r>
+            <a:endParaRPr lang="en-US" sz="900" dirty="0"/>
+          </a:p>
+        </p:txBody>
+      </p:sp>
+      <p:sp>
+        <p:nvSpPr>
+          <p:cNvPr id="54" name="TextBox 53">
+            <a:extLst>
+              <a:ext uri="{FF2B5EF4-FFF2-40B4-BE49-F238E27FC236}">
+                <a16:creationId xmlns:a16="http://schemas.microsoft.com/office/drawing/2014/main" id="{B3A9A5C4-2F94-BD2E-5B64-1AB6C2AB2FEF}"/>
+              </a:ext>
+            </a:extLst>
+          </p:cNvPr>
+          <p:cNvSpPr txBox="1"/>
+          <p:nvPr/>
+        </p:nvSpPr>
+        <p:spPr>
+          <a:xfrm>
+            <a:off x="5645009" y="6019297"/>
+            <a:ext cx="575799" cy="230832"/>
+          </a:xfrm>
+          <a:prstGeom prst="rect">
+            <a:avLst/>
+          </a:prstGeom>
+          <a:noFill/>
+        </p:spPr>
+        <p:txBody>
+          <a:bodyPr wrap="none" rtlCol="0">
+            <a:spAutoFit/>
+          </a:bodyPr>
+          <a:lstStyle/>
+          <a:p>
+            <a:pPr algn="ctr"/>
+            <a:r>
+              <a:rPr lang="en-US" sz="900" dirty="0" err="1"/>
+              <a:t>next_pc</a:t>
+            </a:r>
+            <a:endParaRPr lang="en-US" sz="900" dirty="0"/>
+          </a:p>
+        </p:txBody>
+      </p:sp>
+      <p:sp>
+        <p:nvSpPr>
+          <p:cNvPr id="57" name="TextBox 56">
+            <a:extLst>
+              <a:ext uri="{FF2B5EF4-FFF2-40B4-BE49-F238E27FC236}">
+                <a16:creationId xmlns:a16="http://schemas.microsoft.com/office/drawing/2014/main" id="{C162784B-3456-02F5-E05E-F19E9BA95FFB}"/>
+              </a:ext>
+            </a:extLst>
+          </p:cNvPr>
+          <p:cNvSpPr txBox="1"/>
+          <p:nvPr/>
+        </p:nvSpPr>
+        <p:spPr>
+          <a:xfrm>
+            <a:off x="2283006" y="5271324"/>
+            <a:ext cx="521297" cy="230832"/>
+          </a:xfrm>
+          <a:prstGeom prst="rect">
+            <a:avLst/>
+          </a:prstGeom>
+          <a:noFill/>
+        </p:spPr>
+        <p:txBody>
+          <a:bodyPr wrap="none" rtlCol="0">
+            <a:spAutoFit/>
+          </a:bodyPr>
+          <a:lstStyle/>
+          <a:p>
+            <a:pPr algn="ctr"/>
+            <a:r>
+              <a:rPr lang="en-US" sz="900" dirty="0" err="1"/>
+              <a:t>alu_op</a:t>
+            </a:r>
+            <a:endParaRPr lang="en-US" sz="900" dirty="0"/>
+          </a:p>
+        </p:txBody>
+      </p:sp>
+      <p:sp>
+        <p:nvSpPr>
+          <p:cNvPr id="61" name="TextBox 60">
+            <a:extLst>
+              <a:ext uri="{FF2B5EF4-FFF2-40B4-BE49-F238E27FC236}">
+                <a16:creationId xmlns:a16="http://schemas.microsoft.com/office/drawing/2014/main" id="{23B90349-F98A-7E4E-F78B-BCF98BFA242F}"/>
+              </a:ext>
+            </a:extLst>
+          </p:cNvPr>
+          <p:cNvSpPr txBox="1"/>
+          <p:nvPr/>
+        </p:nvSpPr>
+        <p:spPr>
+          <a:xfrm>
+            <a:off x="352447" y="1871443"/>
+            <a:ext cx="466794" cy="246221"/>
+          </a:xfrm>
+          <a:prstGeom prst="rect">
+            <a:avLst/>
+          </a:prstGeom>
+          <a:noFill/>
+        </p:spPr>
+        <p:txBody>
+          <a:bodyPr wrap="none" rtlCol="0">
+            <a:spAutoFit/>
+          </a:bodyPr>
+          <a:lstStyle/>
+          <a:p>
+            <a:r>
+              <a:rPr lang="en-US" sz="1000" dirty="0"/>
+              <a:t>reset</a:t>
+            </a:r>
+          </a:p>
+        </p:txBody>
+      </p:sp>
+      <p:sp>
+        <p:nvSpPr>
+          <p:cNvPr id="66" name="TextBox 65">
+            <a:extLst>
+              <a:ext uri="{FF2B5EF4-FFF2-40B4-BE49-F238E27FC236}">
+                <a16:creationId xmlns:a16="http://schemas.microsoft.com/office/drawing/2014/main" id="{3FDB5AC4-9DD4-2CD5-BF26-A66E1F88C409}"/>
+              </a:ext>
+            </a:extLst>
+          </p:cNvPr>
+          <p:cNvSpPr txBox="1"/>
+          <p:nvPr/>
+        </p:nvSpPr>
+        <p:spPr>
+          <a:xfrm>
+            <a:off x="164751" y="1875847"/>
+            <a:ext cx="348172" cy="246221"/>
+          </a:xfrm>
+          <a:prstGeom prst="rect">
+            <a:avLst/>
+          </a:prstGeom>
+          <a:noFill/>
+        </p:spPr>
+        <p:txBody>
+          <a:bodyPr wrap="none" rtlCol="0">
+            <a:spAutoFit/>
+          </a:bodyPr>
+          <a:lstStyle/>
+          <a:p>
+            <a:r>
+              <a:rPr lang="en-US" sz="1000" dirty="0" err="1"/>
+              <a:t>clk</a:t>
+            </a:r>
+            <a:endParaRPr lang="en-US" sz="1000" dirty="0"/>
+          </a:p>
+        </p:txBody>
+      </p:sp>
+      <p:cxnSp>
+        <p:nvCxnSpPr>
+          <p:cNvPr id="75" name="Straight Arrow Connector 74">
+            <a:extLst>
+              <a:ext uri="{FF2B5EF4-FFF2-40B4-BE49-F238E27FC236}">
+                <a16:creationId xmlns:a16="http://schemas.microsoft.com/office/drawing/2014/main" id="{67F210FD-C98F-F3C3-E0E3-727A34D07CEE}"/>
+              </a:ext>
+            </a:extLst>
+          </p:cNvPr>
+          <p:cNvCxnSpPr>
+            <a:cxnSpLocks/>
+          </p:cNvCxnSpPr>
+          <p:nvPr/>
+        </p:nvCxnSpPr>
+        <p:spPr>
+          <a:xfrm>
+            <a:off x="431873" y="2073941"/>
+            <a:ext cx="0" cy="156554"/>
+          </a:xfrm>
+          <a:prstGeom prst="straightConnector1">
+            <a:avLst/>
+          </a:prstGeom>
+          <a:ln>
+            <a:tailEnd type="triangle"/>
+          </a:ln>
+        </p:spPr>
+        <p:style>
+          <a:lnRef idx="2">
+            <a:schemeClr val="accent1"/>
+          </a:lnRef>
+          <a:fillRef idx="0">
+            <a:schemeClr val="accent1"/>
+          </a:fillRef>
+          <a:effectRef idx="1">
+            <a:schemeClr val="accent1"/>
+          </a:effectRef>
+          <a:fontRef idx="minor">
+            <a:schemeClr val="tx1"/>
+          </a:fontRef>
+        </p:style>
+      </p:cxnSp>
+      <p:cxnSp>
+        <p:nvCxnSpPr>
+          <p:cNvPr id="76" name="Straight Arrow Connector 75">
+            <a:extLst>
+              <a:ext uri="{FF2B5EF4-FFF2-40B4-BE49-F238E27FC236}">
+                <a16:creationId xmlns:a16="http://schemas.microsoft.com/office/drawing/2014/main" id="{1FFA32AE-D839-48CB-AA6D-70D3D2D08CF0}"/>
+              </a:ext>
+            </a:extLst>
+          </p:cNvPr>
+          <p:cNvCxnSpPr>
+            <a:cxnSpLocks/>
+          </p:cNvCxnSpPr>
+          <p:nvPr/>
+        </p:nvCxnSpPr>
+        <p:spPr>
+          <a:xfrm>
+            <a:off x="555698" y="2073941"/>
+            <a:ext cx="0" cy="156554"/>
+          </a:xfrm>
+          <a:prstGeom prst="straightConnector1">
+            <a:avLst/>
+          </a:prstGeom>
+          <a:ln>
+            <a:tailEnd type="triangle"/>
+          </a:ln>
+        </p:spPr>
+        <p:style>
+          <a:lnRef idx="2">
+            <a:schemeClr val="accent1"/>
+          </a:lnRef>
+          <a:fillRef idx="0">
+            <a:schemeClr val="accent1"/>
+          </a:fillRef>
+          <a:effectRef idx="1">
+            <a:schemeClr val="accent1"/>
+          </a:effectRef>
+          <a:fontRef idx="minor">
+            <a:schemeClr val="tx1"/>
+          </a:fontRef>
+        </p:style>
+      </p:cxnSp>
+      <p:sp>
+        <p:nvSpPr>
+          <p:cNvPr id="78" name="TextBox 77">
+            <a:extLst>
+              <a:ext uri="{FF2B5EF4-FFF2-40B4-BE49-F238E27FC236}">
+                <a16:creationId xmlns:a16="http://schemas.microsoft.com/office/drawing/2014/main" id="{D157441A-DB5A-4CF1-B3C4-FDDF54E365B7}"/>
+              </a:ext>
+            </a:extLst>
+          </p:cNvPr>
+          <p:cNvSpPr txBox="1"/>
+          <p:nvPr/>
+        </p:nvSpPr>
+        <p:spPr>
+          <a:xfrm>
+            <a:off x="2514763" y="3018022"/>
+            <a:ext cx="607859" cy="230832"/>
+          </a:xfrm>
+          <a:prstGeom prst="rect">
+            <a:avLst/>
+          </a:prstGeom>
+          <a:noFill/>
+        </p:spPr>
+        <p:txBody>
+          <a:bodyPr wrap="none" rtlCol="0">
+            <a:spAutoFit/>
+          </a:bodyPr>
+          <a:lstStyle/>
+          <a:p>
+            <a:pPr algn="ctr"/>
+            <a:r>
+              <a:rPr lang="en-US" sz="900" dirty="0" err="1"/>
+              <a:t>wb_data</a:t>
+            </a:r>
+            <a:endParaRPr lang="en-US" sz="900" dirty="0"/>
+          </a:p>
+        </p:txBody>
+      </p:sp>
+      <p:sp>
+        <p:nvSpPr>
+          <p:cNvPr id="79" name="TextBox 78">
+            <a:extLst>
+              <a:ext uri="{FF2B5EF4-FFF2-40B4-BE49-F238E27FC236}">
+                <a16:creationId xmlns:a16="http://schemas.microsoft.com/office/drawing/2014/main" id="{033285E9-9B6E-5235-9D44-2BADCCD17A2C}"/>
+              </a:ext>
+            </a:extLst>
+          </p:cNvPr>
+          <p:cNvSpPr txBox="1"/>
+          <p:nvPr/>
+        </p:nvSpPr>
+        <p:spPr>
+          <a:xfrm>
+            <a:off x="2246897" y="2357587"/>
+            <a:ext cx="1130438" cy="200055"/>
+          </a:xfrm>
+          <a:prstGeom prst="rect">
+            <a:avLst/>
+          </a:prstGeom>
+          <a:noFill/>
+        </p:spPr>
+        <p:txBody>
+          <a:bodyPr wrap="none" rtlCol="0">
+            <a:spAutoFit/>
+          </a:bodyPr>
+          <a:lstStyle/>
+          <a:p>
+            <a:pPr algn="ctr"/>
+            <a:r>
+              <a:rPr lang="en-US" sz="700" dirty="0" err="1"/>
+              <a:t>if_id_instr</a:t>
+            </a:r>
+            <a:r>
+              <a:rPr lang="en-US" sz="700" dirty="0"/>
+              <a:t>(19 </a:t>
+            </a:r>
+            <a:r>
+              <a:rPr lang="en-US" sz="700" dirty="0" err="1"/>
+              <a:t>downto</a:t>
+            </a:r>
+            <a:r>
+              <a:rPr lang="en-US" sz="700" dirty="0"/>
+              <a:t> 15)</a:t>
+            </a:r>
+          </a:p>
+        </p:txBody>
+      </p:sp>
+      <p:sp>
+        <p:nvSpPr>
+          <p:cNvPr id="80" name="TextBox 79">
+            <a:extLst>
+              <a:ext uri="{FF2B5EF4-FFF2-40B4-BE49-F238E27FC236}">
+                <a16:creationId xmlns:a16="http://schemas.microsoft.com/office/drawing/2014/main" id="{84F2A579-D75F-BF36-86E8-7092F26785EE}"/>
+              </a:ext>
+            </a:extLst>
+          </p:cNvPr>
+          <p:cNvSpPr txBox="1"/>
+          <p:nvPr/>
+        </p:nvSpPr>
+        <p:spPr>
+          <a:xfrm>
+            <a:off x="2256728" y="2587626"/>
+            <a:ext cx="1130438" cy="200055"/>
+          </a:xfrm>
+          <a:prstGeom prst="rect">
+            <a:avLst/>
+          </a:prstGeom>
+          <a:noFill/>
+        </p:spPr>
+        <p:txBody>
+          <a:bodyPr wrap="none" rtlCol="0">
+            <a:spAutoFit/>
+          </a:bodyPr>
+          <a:lstStyle/>
+          <a:p>
+            <a:pPr algn="ctr"/>
+            <a:r>
+              <a:rPr lang="en-US" sz="700" dirty="0" err="1"/>
+              <a:t>if_id_instr</a:t>
+            </a:r>
+            <a:r>
+              <a:rPr lang="en-US" sz="700" dirty="0"/>
+              <a:t>(24 </a:t>
+            </a:r>
+            <a:r>
+              <a:rPr lang="en-US" sz="700" dirty="0" err="1"/>
+              <a:t>downto</a:t>
+            </a:r>
+            <a:r>
+              <a:rPr lang="en-US" sz="700" dirty="0"/>
+              <a:t> 20)</a:t>
+            </a:r>
+          </a:p>
+        </p:txBody>
+      </p:sp>
+      <p:sp>
+        <p:nvSpPr>
+          <p:cNvPr id="82" name="TextBox 81">
+            <a:extLst>
+              <a:ext uri="{FF2B5EF4-FFF2-40B4-BE49-F238E27FC236}">
+                <a16:creationId xmlns:a16="http://schemas.microsoft.com/office/drawing/2014/main" id="{61946929-51EC-A34D-AD6D-26FBF661316F}"/>
+              </a:ext>
+            </a:extLst>
+          </p:cNvPr>
+          <p:cNvSpPr txBox="1"/>
+          <p:nvPr/>
+        </p:nvSpPr>
+        <p:spPr>
+          <a:xfrm>
+            <a:off x="2289518" y="2804940"/>
+            <a:ext cx="1082348" cy="200055"/>
+          </a:xfrm>
+          <a:prstGeom prst="rect">
+            <a:avLst/>
+          </a:prstGeom>
+          <a:noFill/>
+        </p:spPr>
+        <p:txBody>
+          <a:bodyPr wrap="none" rtlCol="0">
+            <a:spAutoFit/>
+          </a:bodyPr>
+          <a:lstStyle/>
+          <a:p>
+            <a:pPr algn="ctr"/>
+            <a:r>
+              <a:rPr lang="en-US" sz="700" dirty="0" err="1"/>
+              <a:t>if_id_instr</a:t>
+            </a:r>
+            <a:r>
+              <a:rPr lang="en-US" sz="700" dirty="0"/>
+              <a:t>(11 </a:t>
+            </a:r>
+            <a:r>
+              <a:rPr lang="en-US" sz="700" dirty="0" err="1"/>
+              <a:t>downto</a:t>
+            </a:r>
+            <a:r>
+              <a:rPr lang="en-US" sz="700" dirty="0"/>
+              <a:t> 7)</a:t>
+            </a:r>
+          </a:p>
+        </p:txBody>
+      </p:sp>
+      <p:sp>
+        <p:nvSpPr>
+          <p:cNvPr id="105" name="TextBox 104">
+            <a:extLst>
+              <a:ext uri="{FF2B5EF4-FFF2-40B4-BE49-F238E27FC236}">
+                <a16:creationId xmlns:a16="http://schemas.microsoft.com/office/drawing/2014/main" id="{54AF9B00-941E-6B31-38F8-1A8D639554FD}"/>
+              </a:ext>
+            </a:extLst>
+          </p:cNvPr>
+          <p:cNvSpPr txBox="1"/>
+          <p:nvPr/>
+        </p:nvSpPr>
+        <p:spPr>
+          <a:xfrm>
+            <a:off x="8680597" y="5158841"/>
+            <a:ext cx="1015086" cy="369332"/>
+          </a:xfrm>
+          <a:prstGeom prst="rect">
+            <a:avLst/>
+          </a:prstGeom>
+          <a:noFill/>
+        </p:spPr>
+        <p:txBody>
+          <a:bodyPr wrap="none" rtlCol="0">
+            <a:spAutoFit/>
+          </a:bodyPr>
+          <a:lstStyle/>
+          <a:p>
+            <a:pPr algn="r"/>
+            <a:r>
+              <a:rPr lang="en-US" sz="900" dirty="0" err="1"/>
+              <a:t>Ex_mem_branch</a:t>
+            </a:r>
+            <a:endParaRPr lang="en-US" sz="900" dirty="0"/>
+          </a:p>
+          <a:p>
+            <a:pPr algn="r"/>
+            <a:r>
+              <a:rPr lang="en-US" sz="900" dirty="0" err="1"/>
+              <a:t>Ex_mem_jump</a:t>
+            </a:r>
+            <a:endParaRPr lang="en-US" sz="900" dirty="0"/>
+          </a:p>
+        </p:txBody>
+      </p:sp>
+      <p:sp>
+        <p:nvSpPr>
+          <p:cNvPr id="176" name="Rectangle 175">
+            <a:extLst>
+              <a:ext uri="{FF2B5EF4-FFF2-40B4-BE49-F238E27FC236}">
+                <a16:creationId xmlns:a16="http://schemas.microsoft.com/office/drawing/2014/main" id="{051813C6-4662-A7F9-C3E7-8116D08FA0D1}"/>
+              </a:ext>
+            </a:extLst>
+          </p:cNvPr>
+          <p:cNvSpPr/>
+          <p:nvPr/>
+        </p:nvSpPr>
+        <p:spPr>
+          <a:xfrm>
+            <a:off x="3398783" y="1415773"/>
+            <a:ext cx="865785" cy="641685"/>
+          </a:xfrm>
+          <a:prstGeom prst="rect">
+            <a:avLst/>
+          </a:prstGeom>
+          <a:solidFill>
+            <a:schemeClr val="bg1"/>
+          </a:solidFill>
+        </p:spPr>
+        <p:style>
+          <a:lnRef idx="2">
+            <a:schemeClr val="accent1">
+              <a:shade val="15000"/>
+            </a:schemeClr>
+          </a:lnRef>
+          <a:fillRef idx="1">
+            <a:schemeClr val="accent1"/>
+          </a:fillRef>
+          <a:effectRef idx="0">
+            <a:schemeClr val="accent1"/>
+          </a:effectRef>
+          <a:fontRef idx="minor">
+            <a:schemeClr val="lt1"/>
+          </a:fontRef>
+        </p:style>
+        <p:txBody>
+          <a:bodyPr rtlCol="0" anchor="ctr"/>
+          <a:lstStyle/>
+          <a:p>
+            <a:pPr algn="ctr"/>
+            <a:r>
+              <a:rPr lang="en-US" dirty="0"/>
+              <a:t>PC</a:t>
+            </a:r>
+          </a:p>
+        </p:txBody>
+      </p:sp>
+      <p:sp>
+        <p:nvSpPr>
+          <p:cNvPr id="177" name="TextBox 176">
+            <a:extLst>
+              <a:ext uri="{FF2B5EF4-FFF2-40B4-BE49-F238E27FC236}">
+                <a16:creationId xmlns:a16="http://schemas.microsoft.com/office/drawing/2014/main" id="{096BD6BC-6A58-74AD-6C06-36CF37F73888}"/>
+              </a:ext>
+            </a:extLst>
+          </p:cNvPr>
+          <p:cNvSpPr txBox="1"/>
+          <p:nvPr/>
+        </p:nvSpPr>
+        <p:spPr>
+          <a:xfrm>
+            <a:off x="3489827" y="1395243"/>
+            <a:ext cx="699230" cy="400110"/>
+          </a:xfrm>
+          <a:prstGeom prst="rect">
+            <a:avLst/>
+          </a:prstGeom>
+          <a:noFill/>
+        </p:spPr>
+        <p:txBody>
+          <a:bodyPr wrap="none" rtlCol="0">
+            <a:spAutoFit/>
+          </a:bodyPr>
+          <a:lstStyle/>
+          <a:p>
+            <a:pPr algn="ctr"/>
+            <a:r>
+              <a:rPr lang="en-US" sz="1000" dirty="0"/>
+              <a:t>Pipeline</a:t>
+            </a:r>
+          </a:p>
+          <a:p>
+            <a:pPr algn="ctr"/>
+            <a:r>
+              <a:rPr lang="en-US" sz="1000" dirty="0"/>
+              <a:t>Registers</a:t>
+            </a:r>
+          </a:p>
+        </p:txBody>
+      </p:sp>
+      <p:cxnSp>
+        <p:nvCxnSpPr>
+          <p:cNvPr id="178" name="Straight Arrow Connector 177">
+            <a:extLst>
+              <a:ext uri="{FF2B5EF4-FFF2-40B4-BE49-F238E27FC236}">
+                <a16:creationId xmlns:a16="http://schemas.microsoft.com/office/drawing/2014/main" id="{9701E82F-91FB-356F-D4F3-7D126F6F4447}"/>
+              </a:ext>
+            </a:extLst>
+          </p:cNvPr>
+          <p:cNvCxnSpPr>
+            <a:cxnSpLocks/>
+          </p:cNvCxnSpPr>
+          <p:nvPr/>
+        </p:nvCxnSpPr>
+        <p:spPr>
+          <a:xfrm>
+            <a:off x="3011241" y="1699822"/>
+            <a:ext cx="382936" cy="0"/>
+          </a:xfrm>
+          <a:prstGeom prst="straightConnector1">
+            <a:avLst/>
+          </a:prstGeom>
+          <a:ln>
+            <a:solidFill>
+              <a:srgbClr val="FF0000"/>
+            </a:solidFill>
+            <a:tailEnd type="triangle"/>
+          </a:ln>
+        </p:spPr>
+        <p:style>
+          <a:lnRef idx="2">
+            <a:schemeClr val="accent1"/>
+          </a:lnRef>
+          <a:fillRef idx="0">
+            <a:schemeClr val="accent1"/>
+          </a:fillRef>
+          <a:effectRef idx="1">
+            <a:schemeClr val="accent1"/>
+          </a:effectRef>
+          <a:fontRef idx="minor">
+            <a:schemeClr val="tx1"/>
+          </a:fontRef>
+        </p:style>
+      </p:cxnSp>
+      <p:sp>
+        <p:nvSpPr>
+          <p:cNvPr id="179" name="TextBox 178">
+            <a:extLst>
+              <a:ext uri="{FF2B5EF4-FFF2-40B4-BE49-F238E27FC236}">
+                <a16:creationId xmlns:a16="http://schemas.microsoft.com/office/drawing/2014/main" id="{CB54C38D-99A1-CA89-EABA-06C0D8D2CBEA}"/>
+              </a:ext>
+            </a:extLst>
+          </p:cNvPr>
+          <p:cNvSpPr txBox="1"/>
+          <p:nvPr/>
+        </p:nvSpPr>
+        <p:spPr>
+          <a:xfrm>
+            <a:off x="2556289" y="1554503"/>
+            <a:ext cx="535724" cy="369332"/>
+          </a:xfrm>
+          <a:prstGeom prst="rect">
+            <a:avLst/>
+          </a:prstGeom>
+          <a:noFill/>
+        </p:spPr>
+        <p:txBody>
+          <a:bodyPr wrap="none" rtlCol="0">
+            <a:spAutoFit/>
+          </a:bodyPr>
+          <a:lstStyle/>
+          <a:p>
+            <a:pPr algn="ctr"/>
+            <a:r>
+              <a:rPr lang="en-US" sz="900" dirty="0"/>
+              <a:t>lots of</a:t>
+            </a:r>
+          </a:p>
+          <a:p>
+            <a:pPr algn="ctr"/>
+            <a:r>
+              <a:rPr lang="en-US" sz="900" dirty="0"/>
+              <a:t>signals</a:t>
+            </a:r>
+          </a:p>
+        </p:txBody>
+      </p:sp>
+      <p:cxnSp>
+        <p:nvCxnSpPr>
+          <p:cNvPr id="180" name="Straight Arrow Connector 179">
+            <a:extLst>
+              <a:ext uri="{FF2B5EF4-FFF2-40B4-BE49-F238E27FC236}">
+                <a16:creationId xmlns:a16="http://schemas.microsoft.com/office/drawing/2014/main" id="{BCF2490F-990C-FF42-26D3-9141123EF65F}"/>
+              </a:ext>
+            </a:extLst>
+          </p:cNvPr>
+          <p:cNvCxnSpPr>
+            <a:cxnSpLocks/>
+          </p:cNvCxnSpPr>
+          <p:nvPr/>
+        </p:nvCxnSpPr>
+        <p:spPr>
+          <a:xfrm>
+            <a:off x="4258959" y="1528690"/>
+            <a:ext cx="7595815" cy="0"/>
+          </a:xfrm>
+          <a:prstGeom prst="straightConnector1">
+            <a:avLst/>
+          </a:prstGeom>
+          <a:ln>
+            <a:solidFill>
+              <a:srgbClr val="FF0000"/>
+            </a:solidFill>
+            <a:tailEnd type="triangle"/>
+          </a:ln>
+        </p:spPr>
+        <p:style>
+          <a:lnRef idx="2">
+            <a:schemeClr val="accent1"/>
+          </a:lnRef>
+          <a:fillRef idx="0">
+            <a:schemeClr val="accent1"/>
+          </a:fillRef>
+          <a:effectRef idx="1">
+            <a:schemeClr val="accent1"/>
+          </a:effectRef>
+          <a:fontRef idx="minor">
+            <a:schemeClr val="tx1"/>
+          </a:fontRef>
+        </p:style>
+      </p:cxnSp>
+      <p:sp>
+        <p:nvSpPr>
+          <p:cNvPr id="185" name="TextBox 184">
+            <a:extLst>
+              <a:ext uri="{FF2B5EF4-FFF2-40B4-BE49-F238E27FC236}">
+                <a16:creationId xmlns:a16="http://schemas.microsoft.com/office/drawing/2014/main" id="{D592986C-2571-A469-2492-155CBFE4CB91}"/>
+              </a:ext>
+            </a:extLst>
+          </p:cNvPr>
+          <p:cNvSpPr txBox="1"/>
+          <p:nvPr/>
+        </p:nvSpPr>
+        <p:spPr>
+          <a:xfrm>
+            <a:off x="9485687" y="2554926"/>
+            <a:ext cx="1226619" cy="230832"/>
+          </a:xfrm>
+          <a:prstGeom prst="rect">
+            <a:avLst/>
+          </a:prstGeom>
+          <a:noFill/>
+        </p:spPr>
+        <p:txBody>
+          <a:bodyPr wrap="none" rtlCol="0">
+            <a:spAutoFit/>
+          </a:bodyPr>
+          <a:lstStyle/>
+          <a:p>
+            <a:pPr algn="r"/>
+            <a:r>
+              <a:rPr lang="en-US" sz="900" dirty="0" err="1"/>
+              <a:t>mem_wb_mem_data</a:t>
+            </a:r>
+            <a:endParaRPr lang="en-US" sz="900" dirty="0"/>
+          </a:p>
+        </p:txBody>
+      </p:sp>
+      <p:sp>
+        <p:nvSpPr>
+          <p:cNvPr id="193" name="TextBox 192">
+            <a:extLst>
+              <a:ext uri="{FF2B5EF4-FFF2-40B4-BE49-F238E27FC236}">
+                <a16:creationId xmlns:a16="http://schemas.microsoft.com/office/drawing/2014/main" id="{067710C2-4099-4D47-4431-04C86F0F12E5}"/>
+              </a:ext>
+            </a:extLst>
+          </p:cNvPr>
+          <p:cNvSpPr txBox="1"/>
+          <p:nvPr/>
+        </p:nvSpPr>
+        <p:spPr>
+          <a:xfrm>
+            <a:off x="9443353" y="2786781"/>
+            <a:ext cx="1189749" cy="230832"/>
+          </a:xfrm>
+          <a:prstGeom prst="rect">
+            <a:avLst/>
+          </a:prstGeom>
+          <a:noFill/>
+        </p:spPr>
+        <p:txBody>
+          <a:bodyPr wrap="none" rtlCol="0">
+            <a:spAutoFit/>
+          </a:bodyPr>
+          <a:lstStyle/>
+          <a:p>
+            <a:pPr algn="r"/>
+            <a:r>
+              <a:rPr lang="en-US" sz="900" dirty="0" err="1"/>
+              <a:t>mem_wb_alu_result</a:t>
+            </a:r>
+            <a:endParaRPr lang="en-US" sz="900" dirty="0"/>
+          </a:p>
+        </p:txBody>
+      </p:sp>
+      <p:sp>
+        <p:nvSpPr>
+          <p:cNvPr id="196" name="TextBox 195">
+            <a:extLst>
+              <a:ext uri="{FF2B5EF4-FFF2-40B4-BE49-F238E27FC236}">
+                <a16:creationId xmlns:a16="http://schemas.microsoft.com/office/drawing/2014/main" id="{66202909-61EE-2FA1-E2DC-69F51676E8D4}"/>
+              </a:ext>
+            </a:extLst>
+          </p:cNvPr>
+          <p:cNvSpPr txBox="1"/>
+          <p:nvPr/>
+        </p:nvSpPr>
+        <p:spPr>
+          <a:xfrm>
+            <a:off x="2265396" y="5528173"/>
+            <a:ext cx="978153" cy="1338828"/>
+          </a:xfrm>
+          <a:prstGeom prst="rect">
+            <a:avLst/>
+          </a:prstGeom>
+          <a:noFill/>
+        </p:spPr>
+        <p:txBody>
+          <a:bodyPr wrap="none" rtlCol="0">
+            <a:spAutoFit/>
+          </a:bodyPr>
+          <a:lstStyle/>
+          <a:p>
+            <a:r>
+              <a:rPr lang="en-US" sz="900" dirty="0"/>
+              <a:t>reset</a:t>
+            </a:r>
+          </a:p>
+          <a:p>
+            <a:r>
+              <a:rPr lang="en-US" sz="900" dirty="0" err="1"/>
+              <a:t>if_id_mem_read</a:t>
+            </a:r>
+            <a:endParaRPr lang="en-US" sz="900" dirty="0"/>
+          </a:p>
+          <a:p>
+            <a:r>
+              <a:rPr lang="en-US" sz="900" dirty="0" err="1"/>
+              <a:t>if_id_load_addr</a:t>
+            </a:r>
+            <a:endParaRPr lang="en-US" sz="900" dirty="0"/>
+          </a:p>
+          <a:p>
+            <a:r>
+              <a:rPr lang="en-US" sz="900" dirty="0" err="1"/>
+              <a:t>instr</a:t>
+            </a:r>
+            <a:endParaRPr lang="en-US" sz="900" dirty="0"/>
+          </a:p>
+          <a:p>
+            <a:r>
+              <a:rPr lang="en-US" sz="900" dirty="0" err="1"/>
+              <a:t>if_id_instr</a:t>
+            </a:r>
+            <a:endParaRPr lang="en-US" sz="900" dirty="0"/>
+          </a:p>
+          <a:p>
+            <a:r>
+              <a:rPr lang="en-US" sz="900" dirty="0" err="1"/>
+              <a:t>if_id_rd</a:t>
+            </a:r>
+            <a:endParaRPr lang="en-US" sz="900" dirty="0"/>
+          </a:p>
+          <a:p>
+            <a:r>
+              <a:rPr lang="en-US" sz="900" dirty="0"/>
+              <a:t>rs1</a:t>
+            </a:r>
+          </a:p>
+          <a:p>
+            <a:r>
+              <a:rPr lang="en-US" sz="900" dirty="0"/>
+              <a:t>rs2</a:t>
+            </a:r>
+          </a:p>
+          <a:p>
+            <a:r>
+              <a:rPr lang="en-US" sz="900" dirty="0" err="1"/>
+              <a:t>stall_counter</a:t>
+            </a:r>
+            <a:endParaRPr lang="en-US" sz="900" dirty="0"/>
           </a:p>
         </p:txBody>
       </p:sp>
